--- a/TPs/FR_EN/images.pptx
+++ b/TPs/FR_EN/images.pptx
@@ -7,16 +7,17 @@
   <p:sldIdLst>
     <p:sldId id="265" r:id="rId2"/>
     <p:sldId id="264" r:id="rId3"/>
-    <p:sldId id="257" r:id="rId4"/>
-    <p:sldId id="256" r:id="rId5"/>
-    <p:sldId id="266" r:id="rId6"/>
-    <p:sldId id="267" r:id="rId7"/>
-    <p:sldId id="258" r:id="rId8"/>
-    <p:sldId id="259" r:id="rId9"/>
-    <p:sldId id="260" r:id="rId10"/>
-    <p:sldId id="262" r:id="rId11"/>
-    <p:sldId id="261" r:id="rId12"/>
-    <p:sldId id="263" r:id="rId13"/>
+    <p:sldId id="268" r:id="rId4"/>
+    <p:sldId id="257" r:id="rId5"/>
+    <p:sldId id="256" r:id="rId6"/>
+    <p:sldId id="266" r:id="rId7"/>
+    <p:sldId id="267" r:id="rId8"/>
+    <p:sldId id="258" r:id="rId9"/>
+    <p:sldId id="259" r:id="rId10"/>
+    <p:sldId id="260" r:id="rId11"/>
+    <p:sldId id="262" r:id="rId12"/>
+    <p:sldId id="261" r:id="rId13"/>
+    <p:sldId id="263" r:id="rId14"/>
   </p:sldIdLst>
   <p:sldSz cx="12192000" cy="6858000"/>
   <p:notesSz cx="6858000" cy="9144000"/>
@@ -123,6 +124,107 @@
 </p:presentation>
 </file>
 
+<file path=ppt/revisionInfo.xml><?xml version="1.0" encoding="utf-8"?>
+<p1510:revInfo xmlns:a="http://schemas.openxmlformats.org/drawingml/2006/main" xmlns:r="http://schemas.openxmlformats.org/officeDocument/2006/relationships" xmlns:p1510="http://schemas.microsoft.com/office/powerpoint/2015/10/main">
+  <p1510:revLst>
+    <p1510:client id="{B6D36FE2-2785-41B6-AC54-166658F2A731}" v="6" dt="2026-06-22T12:17:59.545"/>
+  </p1510:revLst>
+</p1510:revInfo>
+</file>
+
+<file path=ppt/changesInfos/changesInfo1.xml><?xml version="1.0" encoding="utf-8"?>
+<pc:chgInfo xmlns:a="http://schemas.openxmlformats.org/drawingml/2006/main" xmlns:r="http://schemas.openxmlformats.org/officeDocument/2006/relationships" xmlns:ac="http://schemas.microsoft.com/office/drawing/2013/main/command" xmlns:pc="http://schemas.microsoft.com/office/powerpoint/2013/main/command">
+  <pc:docChgLst>
+    <pc:chgData name="Alexis MARTIN" userId="ec32c3d9-5957-42d0-8757-996fd533d25b" providerId="ADAL" clId="{B76BE869-635B-4DC9-A437-AFDC8BC5A345}"/>
+    <pc:docChg chg="custSel addSld modSld">
+      <pc:chgData name="Alexis MARTIN" userId="ec32c3d9-5957-42d0-8757-996fd533d25b" providerId="ADAL" clId="{B76BE869-635B-4DC9-A437-AFDC8BC5A345}" dt="2026-06-22T12:22:47.889" v="131" actId="1037"/>
+      <pc:docMkLst>
+        <pc:docMk/>
+      </pc:docMkLst>
+      <pc:sldChg chg="addSp delSp modSp new mod">
+        <pc:chgData name="Alexis MARTIN" userId="ec32c3d9-5957-42d0-8757-996fd533d25b" providerId="ADAL" clId="{B76BE869-635B-4DC9-A437-AFDC8BC5A345}" dt="2026-06-22T12:22:47.889" v="131" actId="1037"/>
+        <pc:sldMkLst>
+          <pc:docMk/>
+          <pc:sldMk cId="137391853" sldId="268"/>
+        </pc:sldMkLst>
+        <pc:spChg chg="del">
+          <ac:chgData name="Alexis MARTIN" userId="ec32c3d9-5957-42d0-8757-996fd533d25b" providerId="ADAL" clId="{B76BE869-635B-4DC9-A437-AFDC8BC5A345}" dt="2026-06-22T12:12:27.461" v="1" actId="478"/>
+          <ac:spMkLst>
+            <pc:docMk/>
+            <pc:sldMk cId="137391853" sldId="268"/>
+            <ac:spMk id="2" creationId="{A25AE2BB-F0EF-6530-95CE-197C714BD407}"/>
+          </ac:spMkLst>
+        </pc:spChg>
+        <pc:spChg chg="del">
+          <ac:chgData name="Alexis MARTIN" userId="ec32c3d9-5957-42d0-8757-996fd533d25b" providerId="ADAL" clId="{B76BE869-635B-4DC9-A437-AFDC8BC5A345}" dt="2026-06-22T12:12:27.461" v="1" actId="478"/>
+          <ac:spMkLst>
+            <pc:docMk/>
+            <pc:sldMk cId="137391853" sldId="268"/>
+            <ac:spMk id="3" creationId="{1C46A474-64F0-D078-429A-77946520AD15}"/>
+          </ac:spMkLst>
+        </pc:spChg>
+        <pc:spChg chg="add mod">
+          <ac:chgData name="Alexis MARTIN" userId="ec32c3d9-5957-42d0-8757-996fd533d25b" providerId="ADAL" clId="{B76BE869-635B-4DC9-A437-AFDC8BC5A345}" dt="2026-06-22T12:22:33.392" v="119" actId="208"/>
+          <ac:spMkLst>
+            <pc:docMk/>
+            <pc:sldMk cId="137391853" sldId="268"/>
+            <ac:spMk id="6" creationId="{5A8B524F-3386-6B34-99D0-1E169D38B9CE}"/>
+          </ac:spMkLst>
+        </pc:spChg>
+        <pc:spChg chg="add mod">
+          <ac:chgData name="Alexis MARTIN" userId="ec32c3d9-5957-42d0-8757-996fd533d25b" providerId="ADAL" clId="{B76BE869-635B-4DC9-A437-AFDC8BC5A345}" dt="2026-06-22T12:22:33.392" v="119" actId="208"/>
+          <ac:spMkLst>
+            <pc:docMk/>
+            <pc:sldMk cId="137391853" sldId="268"/>
+            <ac:spMk id="7" creationId="{1844C822-5825-7289-F48C-0D943F099511}"/>
+          </ac:spMkLst>
+        </pc:spChg>
+        <pc:spChg chg="add mod">
+          <ac:chgData name="Alexis MARTIN" userId="ec32c3d9-5957-42d0-8757-996fd533d25b" providerId="ADAL" clId="{B76BE869-635B-4DC9-A437-AFDC8BC5A345}" dt="2026-06-22T12:22:47.889" v="131" actId="1037"/>
+          <ac:spMkLst>
+            <pc:docMk/>
+            <pc:sldMk cId="137391853" sldId="268"/>
+            <ac:spMk id="8" creationId="{E1319278-42B0-44F8-C96F-1366EC95D0D8}"/>
+          </ac:spMkLst>
+        </pc:spChg>
+        <pc:spChg chg="add mod">
+          <ac:chgData name="Alexis MARTIN" userId="ec32c3d9-5957-42d0-8757-996fd533d25b" providerId="ADAL" clId="{B76BE869-635B-4DC9-A437-AFDC8BC5A345}" dt="2026-06-22T12:22:27.736" v="117" actId="207"/>
+          <ac:spMkLst>
+            <pc:docMk/>
+            <pc:sldMk cId="137391853" sldId="268"/>
+            <ac:spMk id="9" creationId="{A60997E7-0FCD-AC74-3364-84A56E302DC7}"/>
+          </ac:spMkLst>
+        </pc:spChg>
+        <pc:spChg chg="add mod">
+          <ac:chgData name="Alexis MARTIN" userId="ec32c3d9-5957-42d0-8757-996fd533d25b" providerId="ADAL" clId="{B76BE869-635B-4DC9-A437-AFDC8BC5A345}" dt="2026-06-22T12:22:18.817" v="115" actId="207"/>
+          <ac:spMkLst>
+            <pc:docMk/>
+            <pc:sldMk cId="137391853" sldId="268"/>
+            <ac:spMk id="14" creationId="{47A09A54-0967-738F-4E0D-B8BC2472DD70}"/>
+          </ac:spMkLst>
+        </pc:spChg>
+        <pc:picChg chg="add mod modCrop">
+          <ac:chgData name="Alexis MARTIN" userId="ec32c3d9-5957-42d0-8757-996fd533d25b" providerId="ADAL" clId="{B76BE869-635B-4DC9-A437-AFDC8BC5A345}" dt="2026-06-22T12:12:50.194" v="9" actId="1076"/>
+          <ac:picMkLst>
+            <pc:docMk/>
+            <pc:sldMk cId="137391853" sldId="268"/>
+            <ac:picMk id="5" creationId="{623DD589-21DB-BE1D-BC4E-631AAFC2B525}"/>
+          </ac:picMkLst>
+        </pc:picChg>
+        <pc:cxnChg chg="add mod">
+          <ac:chgData name="Alexis MARTIN" userId="ec32c3d9-5957-42d0-8757-996fd533d25b" providerId="ADAL" clId="{B76BE869-635B-4DC9-A437-AFDC8BC5A345}" dt="2026-06-22T12:22:24.254" v="116" actId="208"/>
+          <ac:cxnSpMkLst>
+            <pc:docMk/>
+            <pc:sldMk cId="137391853" sldId="268"/>
+            <ac:cxnSpMk id="11" creationId="{FB275445-A7FB-30CE-BFE2-39DC2701A19F}"/>
+          </ac:cxnSpMkLst>
+        </pc:cxnChg>
+      </pc:sldChg>
+    </pc:docChg>
+  </pc:docChgLst>
+</pc:chgInfo>
+</file>
+
 <file path=ppt/slideLayouts/slideLayout1.xml><?xml version="1.0" encoding="utf-8"?>
 <p:sldLayout xmlns:a="http://schemas.openxmlformats.org/drawingml/2006/main" xmlns:r="http://schemas.openxmlformats.org/officeDocument/2006/relationships" xmlns:p="http://schemas.openxmlformats.org/presentationml/2006/main" type="title" preserve="1">
   <p:cSld name="Diapositive de titre">
@@ -165,10 +267,9 @@
           </a:lstStyle>
           <a:p>
             <a:r>
-              <a:rPr lang="fr-FR" smtClean="0"/>
+              <a:rPr lang="fr-FR"/>
               <a:t>Modifiez le style du titre</a:t>
             </a:r>
-            <a:endParaRPr lang="fr-FR"/>
           </a:p>
         </p:txBody>
       </p:sp>
@@ -230,10 +331,9 @@
           </a:lstStyle>
           <a:p>
             <a:r>
-              <a:rPr lang="fr-FR" smtClean="0"/>
+              <a:rPr lang="fr-FR"/>
               <a:t>Modifier le style des sous-titres du masque</a:t>
             </a:r>
-            <a:endParaRPr lang="fr-FR"/>
           </a:p>
         </p:txBody>
       </p:sp>
@@ -254,7 +354,7 @@
           <a:p>
             <a:fld id="{3C81DF40-1B9F-48AE-A782-32F07490D82F}" type="datetimeFigureOut">
               <a:rPr lang="fr-FR" smtClean="0"/>
-              <a:t>26/08/2024</a:t>
+              <a:t>22/06/2026</a:t>
             </a:fld>
             <a:endParaRPr lang="fr-FR"/>
           </a:p>
@@ -348,10 +448,9 @@
           <a:lstStyle/>
           <a:p>
             <a:r>
-              <a:rPr lang="fr-FR" smtClean="0"/>
+              <a:rPr lang="fr-FR"/>
               <a:t>Modifiez le style du titre</a:t>
             </a:r>
-            <a:endParaRPr lang="fr-FR"/>
           </a:p>
         </p:txBody>
       </p:sp>
@@ -372,38 +471,37 @@
           <a:p>
             <a:pPr lvl="0"/>
             <a:r>
-              <a:rPr lang="fr-FR" smtClean="0"/>
+              <a:rPr lang="fr-FR"/>
               <a:t>Modifier les styles du texte du masque</a:t>
             </a:r>
           </a:p>
           <a:p>
             <a:pPr lvl="1"/>
             <a:r>
-              <a:rPr lang="fr-FR" smtClean="0"/>
+              <a:rPr lang="fr-FR"/>
               <a:t>Deuxième niveau</a:t>
             </a:r>
           </a:p>
           <a:p>
             <a:pPr lvl="2"/>
             <a:r>
-              <a:rPr lang="fr-FR" smtClean="0"/>
+              <a:rPr lang="fr-FR"/>
               <a:t>Troisième niveau</a:t>
             </a:r>
           </a:p>
           <a:p>
             <a:pPr lvl="3"/>
             <a:r>
-              <a:rPr lang="fr-FR" smtClean="0"/>
+              <a:rPr lang="fr-FR"/>
               <a:t>Quatrième niveau</a:t>
             </a:r>
           </a:p>
           <a:p>
             <a:pPr lvl="4"/>
             <a:r>
-              <a:rPr lang="fr-FR" smtClean="0"/>
+              <a:rPr lang="fr-FR"/>
               <a:t>Cinquième niveau</a:t>
             </a:r>
-            <a:endParaRPr lang="fr-FR"/>
           </a:p>
         </p:txBody>
       </p:sp>
@@ -424,7 +522,7 @@
           <a:p>
             <a:fld id="{3C81DF40-1B9F-48AE-A782-32F07490D82F}" type="datetimeFigureOut">
               <a:rPr lang="fr-FR" smtClean="0"/>
-              <a:t>26/08/2024</a:t>
+              <a:t>22/06/2026</a:t>
             </a:fld>
             <a:endParaRPr lang="fr-FR"/>
           </a:p>
@@ -523,10 +621,9 @@
           <a:lstStyle/>
           <a:p>
             <a:r>
-              <a:rPr lang="fr-FR" smtClean="0"/>
+              <a:rPr lang="fr-FR"/>
               <a:t>Modifiez le style du titre</a:t>
             </a:r>
-            <a:endParaRPr lang="fr-FR"/>
           </a:p>
         </p:txBody>
       </p:sp>
@@ -552,38 +649,37 @@
           <a:p>
             <a:pPr lvl="0"/>
             <a:r>
-              <a:rPr lang="fr-FR" smtClean="0"/>
+              <a:rPr lang="fr-FR"/>
               <a:t>Modifier les styles du texte du masque</a:t>
             </a:r>
           </a:p>
           <a:p>
             <a:pPr lvl="1"/>
             <a:r>
-              <a:rPr lang="fr-FR" smtClean="0"/>
+              <a:rPr lang="fr-FR"/>
               <a:t>Deuxième niveau</a:t>
             </a:r>
           </a:p>
           <a:p>
             <a:pPr lvl="2"/>
             <a:r>
-              <a:rPr lang="fr-FR" smtClean="0"/>
+              <a:rPr lang="fr-FR"/>
               <a:t>Troisième niveau</a:t>
             </a:r>
           </a:p>
           <a:p>
             <a:pPr lvl="3"/>
             <a:r>
-              <a:rPr lang="fr-FR" smtClean="0"/>
+              <a:rPr lang="fr-FR"/>
               <a:t>Quatrième niveau</a:t>
             </a:r>
           </a:p>
           <a:p>
             <a:pPr lvl="4"/>
             <a:r>
-              <a:rPr lang="fr-FR" smtClean="0"/>
+              <a:rPr lang="fr-FR"/>
               <a:t>Cinquième niveau</a:t>
             </a:r>
-            <a:endParaRPr lang="fr-FR"/>
           </a:p>
         </p:txBody>
       </p:sp>
@@ -604,7 +700,7 @@
           <a:p>
             <a:fld id="{3C81DF40-1B9F-48AE-A782-32F07490D82F}" type="datetimeFigureOut">
               <a:rPr lang="fr-FR" smtClean="0"/>
-              <a:t>26/08/2024</a:t>
+              <a:t>22/06/2026</a:t>
             </a:fld>
             <a:endParaRPr lang="fr-FR"/>
           </a:p>
@@ -698,10 +794,9 @@
           <a:lstStyle/>
           <a:p>
             <a:r>
-              <a:rPr lang="fr-FR" smtClean="0"/>
+              <a:rPr lang="fr-FR"/>
               <a:t>Modifiez le style du titre</a:t>
             </a:r>
-            <a:endParaRPr lang="fr-FR"/>
           </a:p>
         </p:txBody>
       </p:sp>
@@ -722,38 +817,37 @@
           <a:p>
             <a:pPr lvl="0"/>
             <a:r>
-              <a:rPr lang="fr-FR" smtClean="0"/>
+              <a:rPr lang="fr-FR"/>
               <a:t>Modifier les styles du texte du masque</a:t>
             </a:r>
           </a:p>
           <a:p>
             <a:pPr lvl="1"/>
             <a:r>
-              <a:rPr lang="fr-FR" smtClean="0"/>
+              <a:rPr lang="fr-FR"/>
               <a:t>Deuxième niveau</a:t>
             </a:r>
           </a:p>
           <a:p>
             <a:pPr lvl="2"/>
             <a:r>
-              <a:rPr lang="fr-FR" smtClean="0"/>
+              <a:rPr lang="fr-FR"/>
               <a:t>Troisième niveau</a:t>
             </a:r>
           </a:p>
           <a:p>
             <a:pPr lvl="3"/>
             <a:r>
-              <a:rPr lang="fr-FR" smtClean="0"/>
+              <a:rPr lang="fr-FR"/>
               <a:t>Quatrième niveau</a:t>
             </a:r>
           </a:p>
           <a:p>
             <a:pPr lvl="4"/>
             <a:r>
-              <a:rPr lang="fr-FR" smtClean="0"/>
+              <a:rPr lang="fr-FR"/>
               <a:t>Cinquième niveau</a:t>
             </a:r>
-            <a:endParaRPr lang="fr-FR"/>
           </a:p>
         </p:txBody>
       </p:sp>
@@ -774,7 +868,7 @@
           <a:p>
             <a:fld id="{3C81DF40-1B9F-48AE-A782-32F07490D82F}" type="datetimeFigureOut">
               <a:rPr lang="fr-FR" smtClean="0"/>
-              <a:t>26/08/2024</a:t>
+              <a:t>22/06/2026</a:t>
             </a:fld>
             <a:endParaRPr lang="fr-FR"/>
           </a:p>
@@ -877,10 +971,9 @@
           </a:lstStyle>
           <a:p>
             <a:r>
-              <a:rPr lang="fr-FR" smtClean="0"/>
+              <a:rPr lang="fr-FR"/>
               <a:t>Modifiez le style du titre</a:t>
             </a:r>
-            <a:endParaRPr lang="fr-FR"/>
           </a:p>
         </p:txBody>
       </p:sp>
@@ -997,7 +1090,7 @@
           <a:p>
             <a:pPr lvl="0"/>
             <a:r>
-              <a:rPr lang="fr-FR" smtClean="0"/>
+              <a:rPr lang="fr-FR"/>
               <a:t>Modifier les styles du texte du masque</a:t>
             </a:r>
           </a:p>
@@ -1020,7 +1113,7 @@
           <a:p>
             <a:fld id="{3C81DF40-1B9F-48AE-A782-32F07490D82F}" type="datetimeFigureOut">
               <a:rPr lang="fr-FR" smtClean="0"/>
-              <a:t>26/08/2024</a:t>
+              <a:t>22/06/2026</a:t>
             </a:fld>
             <a:endParaRPr lang="fr-FR"/>
           </a:p>
@@ -1114,10 +1207,9 @@
           <a:lstStyle/>
           <a:p>
             <a:r>
-              <a:rPr lang="fr-FR" smtClean="0"/>
+              <a:rPr lang="fr-FR"/>
               <a:t>Modifiez le style du titre</a:t>
             </a:r>
-            <a:endParaRPr lang="fr-FR"/>
           </a:p>
         </p:txBody>
       </p:sp>
@@ -1143,38 +1235,37 @@
           <a:p>
             <a:pPr lvl="0"/>
             <a:r>
-              <a:rPr lang="fr-FR" smtClean="0"/>
+              <a:rPr lang="fr-FR"/>
               <a:t>Modifier les styles du texte du masque</a:t>
             </a:r>
           </a:p>
           <a:p>
             <a:pPr lvl="1"/>
             <a:r>
-              <a:rPr lang="fr-FR" smtClean="0"/>
+              <a:rPr lang="fr-FR"/>
               <a:t>Deuxième niveau</a:t>
             </a:r>
           </a:p>
           <a:p>
             <a:pPr lvl="2"/>
             <a:r>
-              <a:rPr lang="fr-FR" smtClean="0"/>
+              <a:rPr lang="fr-FR"/>
               <a:t>Troisième niveau</a:t>
             </a:r>
           </a:p>
           <a:p>
             <a:pPr lvl="3"/>
             <a:r>
-              <a:rPr lang="fr-FR" smtClean="0"/>
+              <a:rPr lang="fr-FR"/>
               <a:t>Quatrième niveau</a:t>
             </a:r>
           </a:p>
           <a:p>
             <a:pPr lvl="4"/>
             <a:r>
-              <a:rPr lang="fr-FR" smtClean="0"/>
+              <a:rPr lang="fr-FR"/>
               <a:t>Cinquième niveau</a:t>
             </a:r>
-            <a:endParaRPr lang="fr-FR"/>
           </a:p>
         </p:txBody>
       </p:sp>
@@ -1200,38 +1291,37 @@
           <a:p>
             <a:pPr lvl="0"/>
             <a:r>
-              <a:rPr lang="fr-FR" smtClean="0"/>
+              <a:rPr lang="fr-FR"/>
               <a:t>Modifier les styles du texte du masque</a:t>
             </a:r>
           </a:p>
           <a:p>
             <a:pPr lvl="1"/>
             <a:r>
-              <a:rPr lang="fr-FR" smtClean="0"/>
+              <a:rPr lang="fr-FR"/>
               <a:t>Deuxième niveau</a:t>
             </a:r>
           </a:p>
           <a:p>
             <a:pPr lvl="2"/>
             <a:r>
-              <a:rPr lang="fr-FR" smtClean="0"/>
+              <a:rPr lang="fr-FR"/>
               <a:t>Troisième niveau</a:t>
             </a:r>
           </a:p>
           <a:p>
             <a:pPr lvl="3"/>
             <a:r>
-              <a:rPr lang="fr-FR" smtClean="0"/>
+              <a:rPr lang="fr-FR"/>
               <a:t>Quatrième niveau</a:t>
             </a:r>
           </a:p>
           <a:p>
             <a:pPr lvl="4"/>
             <a:r>
-              <a:rPr lang="fr-FR" smtClean="0"/>
+              <a:rPr lang="fr-FR"/>
               <a:t>Cinquième niveau</a:t>
             </a:r>
-            <a:endParaRPr lang="fr-FR"/>
           </a:p>
         </p:txBody>
       </p:sp>
@@ -1252,7 +1342,7 @@
           <a:p>
             <a:fld id="{3C81DF40-1B9F-48AE-A782-32F07490D82F}" type="datetimeFigureOut">
               <a:rPr lang="fr-FR" smtClean="0"/>
-              <a:t>26/08/2024</a:t>
+              <a:t>22/06/2026</a:t>
             </a:fld>
             <a:endParaRPr lang="fr-FR"/>
           </a:p>
@@ -1351,10 +1441,9 @@
           <a:lstStyle/>
           <a:p>
             <a:r>
-              <a:rPr lang="fr-FR" smtClean="0"/>
+              <a:rPr lang="fr-FR"/>
               <a:t>Modifiez le style du titre</a:t>
             </a:r>
-            <a:endParaRPr lang="fr-FR"/>
           </a:p>
         </p:txBody>
       </p:sp>
@@ -1417,7 +1506,7 @@
           <a:p>
             <a:pPr lvl="0"/>
             <a:r>
-              <a:rPr lang="fr-FR" smtClean="0"/>
+              <a:rPr lang="fr-FR"/>
               <a:t>Modifier les styles du texte du masque</a:t>
             </a:r>
           </a:p>
@@ -1445,38 +1534,37 @@
           <a:p>
             <a:pPr lvl="0"/>
             <a:r>
-              <a:rPr lang="fr-FR" smtClean="0"/>
+              <a:rPr lang="fr-FR"/>
               <a:t>Modifier les styles du texte du masque</a:t>
             </a:r>
           </a:p>
           <a:p>
             <a:pPr lvl="1"/>
             <a:r>
-              <a:rPr lang="fr-FR" smtClean="0"/>
+              <a:rPr lang="fr-FR"/>
               <a:t>Deuxième niveau</a:t>
             </a:r>
           </a:p>
           <a:p>
             <a:pPr lvl="2"/>
             <a:r>
-              <a:rPr lang="fr-FR" smtClean="0"/>
+              <a:rPr lang="fr-FR"/>
               <a:t>Troisième niveau</a:t>
             </a:r>
           </a:p>
           <a:p>
             <a:pPr lvl="3"/>
             <a:r>
-              <a:rPr lang="fr-FR" smtClean="0"/>
+              <a:rPr lang="fr-FR"/>
               <a:t>Quatrième niveau</a:t>
             </a:r>
           </a:p>
           <a:p>
             <a:pPr lvl="4"/>
             <a:r>
-              <a:rPr lang="fr-FR" smtClean="0"/>
+              <a:rPr lang="fr-FR"/>
               <a:t>Cinquième niveau</a:t>
             </a:r>
-            <a:endParaRPr lang="fr-FR"/>
           </a:p>
         </p:txBody>
       </p:sp>
@@ -1539,7 +1627,7 @@
           <a:p>
             <a:pPr lvl="0"/>
             <a:r>
-              <a:rPr lang="fr-FR" smtClean="0"/>
+              <a:rPr lang="fr-FR"/>
               <a:t>Modifier les styles du texte du masque</a:t>
             </a:r>
           </a:p>
@@ -1567,38 +1655,37 @@
           <a:p>
             <a:pPr lvl="0"/>
             <a:r>
-              <a:rPr lang="fr-FR" smtClean="0"/>
+              <a:rPr lang="fr-FR"/>
               <a:t>Modifier les styles du texte du masque</a:t>
             </a:r>
           </a:p>
           <a:p>
             <a:pPr lvl="1"/>
             <a:r>
-              <a:rPr lang="fr-FR" smtClean="0"/>
+              <a:rPr lang="fr-FR"/>
               <a:t>Deuxième niveau</a:t>
             </a:r>
           </a:p>
           <a:p>
             <a:pPr lvl="2"/>
             <a:r>
-              <a:rPr lang="fr-FR" smtClean="0"/>
+              <a:rPr lang="fr-FR"/>
               <a:t>Troisième niveau</a:t>
             </a:r>
           </a:p>
           <a:p>
             <a:pPr lvl="3"/>
             <a:r>
-              <a:rPr lang="fr-FR" smtClean="0"/>
+              <a:rPr lang="fr-FR"/>
               <a:t>Quatrième niveau</a:t>
             </a:r>
           </a:p>
           <a:p>
             <a:pPr lvl="4"/>
             <a:r>
-              <a:rPr lang="fr-FR" smtClean="0"/>
+              <a:rPr lang="fr-FR"/>
               <a:t>Cinquième niveau</a:t>
             </a:r>
-            <a:endParaRPr lang="fr-FR"/>
           </a:p>
         </p:txBody>
       </p:sp>
@@ -1619,7 +1706,7 @@
           <a:p>
             <a:fld id="{3C81DF40-1B9F-48AE-A782-32F07490D82F}" type="datetimeFigureOut">
               <a:rPr lang="fr-FR" smtClean="0"/>
-              <a:t>26/08/2024</a:t>
+              <a:t>22/06/2026</a:t>
             </a:fld>
             <a:endParaRPr lang="fr-FR"/>
           </a:p>
@@ -1713,10 +1800,9 @@
           <a:lstStyle/>
           <a:p>
             <a:r>
-              <a:rPr lang="fr-FR" smtClean="0"/>
+              <a:rPr lang="fr-FR"/>
               <a:t>Modifiez le style du titre</a:t>
             </a:r>
-            <a:endParaRPr lang="fr-FR"/>
           </a:p>
         </p:txBody>
       </p:sp>
@@ -1737,7 +1823,7 @@
           <a:p>
             <a:fld id="{3C81DF40-1B9F-48AE-A782-32F07490D82F}" type="datetimeFigureOut">
               <a:rPr lang="fr-FR" smtClean="0"/>
-              <a:t>26/08/2024</a:t>
+              <a:t>22/06/2026</a:t>
             </a:fld>
             <a:endParaRPr lang="fr-FR"/>
           </a:p>
@@ -1832,7 +1918,7 @@
           <a:p>
             <a:fld id="{3C81DF40-1B9F-48AE-A782-32F07490D82F}" type="datetimeFigureOut">
               <a:rPr lang="fr-FR" smtClean="0"/>
-              <a:t>26/08/2024</a:t>
+              <a:t>22/06/2026</a:t>
             </a:fld>
             <a:endParaRPr lang="fr-FR"/>
           </a:p>
@@ -1935,10 +2021,9 @@
           </a:lstStyle>
           <a:p>
             <a:r>
-              <a:rPr lang="fr-FR" smtClean="0"/>
+              <a:rPr lang="fr-FR"/>
               <a:t>Modifiez le style du titre</a:t>
             </a:r>
-            <a:endParaRPr lang="fr-FR"/>
           </a:p>
         </p:txBody>
       </p:sp>
@@ -1992,38 +2077,37 @@
           <a:p>
             <a:pPr lvl="0"/>
             <a:r>
-              <a:rPr lang="fr-FR" smtClean="0"/>
+              <a:rPr lang="fr-FR"/>
               <a:t>Modifier les styles du texte du masque</a:t>
             </a:r>
           </a:p>
           <a:p>
             <a:pPr lvl="1"/>
             <a:r>
-              <a:rPr lang="fr-FR" smtClean="0"/>
+              <a:rPr lang="fr-FR"/>
               <a:t>Deuxième niveau</a:t>
             </a:r>
           </a:p>
           <a:p>
             <a:pPr lvl="2"/>
             <a:r>
-              <a:rPr lang="fr-FR" smtClean="0"/>
+              <a:rPr lang="fr-FR"/>
               <a:t>Troisième niveau</a:t>
             </a:r>
           </a:p>
           <a:p>
             <a:pPr lvl="3"/>
             <a:r>
-              <a:rPr lang="fr-FR" smtClean="0"/>
+              <a:rPr lang="fr-FR"/>
               <a:t>Quatrième niveau</a:t>
             </a:r>
           </a:p>
           <a:p>
             <a:pPr lvl="4"/>
             <a:r>
-              <a:rPr lang="fr-FR" smtClean="0"/>
+              <a:rPr lang="fr-FR"/>
               <a:t>Cinquième niveau</a:t>
             </a:r>
-            <a:endParaRPr lang="fr-FR"/>
           </a:p>
         </p:txBody>
       </p:sp>
@@ -2086,7 +2170,7 @@
           <a:p>
             <a:pPr lvl="0"/>
             <a:r>
-              <a:rPr lang="fr-FR" smtClean="0"/>
+              <a:rPr lang="fr-FR"/>
               <a:t>Modifier les styles du texte du masque</a:t>
             </a:r>
           </a:p>
@@ -2109,7 +2193,7 @@
           <a:p>
             <a:fld id="{3C81DF40-1B9F-48AE-A782-32F07490D82F}" type="datetimeFigureOut">
               <a:rPr lang="fr-FR" smtClean="0"/>
-              <a:t>26/08/2024</a:t>
+              <a:t>22/06/2026</a:t>
             </a:fld>
             <a:endParaRPr lang="fr-FR"/>
           </a:p>
@@ -2212,10 +2296,9 @@
           </a:lstStyle>
           <a:p>
             <a:r>
-              <a:rPr lang="fr-FR" smtClean="0"/>
+              <a:rPr lang="fr-FR"/>
               <a:t>Modifiez le style du titre</a:t>
             </a:r>
-            <a:endParaRPr lang="fr-FR"/>
           </a:p>
         </p:txBody>
       </p:sp>
@@ -2339,7 +2422,7 @@
           <a:p>
             <a:pPr lvl="0"/>
             <a:r>
-              <a:rPr lang="fr-FR" smtClean="0"/>
+              <a:rPr lang="fr-FR"/>
               <a:t>Modifier les styles du texte du masque</a:t>
             </a:r>
           </a:p>
@@ -2362,7 +2445,7 @@
           <a:p>
             <a:fld id="{3C81DF40-1B9F-48AE-A782-32F07490D82F}" type="datetimeFigureOut">
               <a:rPr lang="fr-FR" smtClean="0"/>
-              <a:t>26/08/2024</a:t>
+              <a:t>22/06/2026</a:t>
             </a:fld>
             <a:endParaRPr lang="fr-FR"/>
           </a:p>
@@ -2471,10 +2554,9 @@
           <a:lstStyle/>
           <a:p>
             <a:r>
-              <a:rPr lang="fr-FR" smtClean="0"/>
+              <a:rPr lang="fr-FR"/>
               <a:t>Modifiez le style du titre</a:t>
             </a:r>
-            <a:endParaRPr lang="fr-FR"/>
           </a:p>
         </p:txBody>
       </p:sp>
@@ -2505,38 +2587,37 @@
           <a:p>
             <a:pPr lvl="0"/>
             <a:r>
-              <a:rPr lang="fr-FR" smtClean="0"/>
+              <a:rPr lang="fr-FR"/>
               <a:t>Modifier les styles du texte du masque</a:t>
             </a:r>
           </a:p>
           <a:p>
             <a:pPr lvl="1"/>
             <a:r>
-              <a:rPr lang="fr-FR" smtClean="0"/>
+              <a:rPr lang="fr-FR"/>
               <a:t>Deuxième niveau</a:t>
             </a:r>
           </a:p>
           <a:p>
             <a:pPr lvl="2"/>
             <a:r>
-              <a:rPr lang="fr-FR" smtClean="0"/>
+              <a:rPr lang="fr-FR"/>
               <a:t>Troisième niveau</a:t>
             </a:r>
           </a:p>
           <a:p>
             <a:pPr lvl="3"/>
             <a:r>
-              <a:rPr lang="fr-FR" smtClean="0"/>
+              <a:rPr lang="fr-FR"/>
               <a:t>Quatrième niveau</a:t>
             </a:r>
           </a:p>
           <a:p>
             <a:pPr lvl="4"/>
             <a:r>
-              <a:rPr lang="fr-FR" smtClean="0"/>
+              <a:rPr lang="fr-FR"/>
               <a:t>Cinquième niveau</a:t>
             </a:r>
-            <a:endParaRPr lang="fr-FR"/>
           </a:p>
         </p:txBody>
       </p:sp>
@@ -2575,7 +2656,7 @@
           <a:p>
             <a:fld id="{3C81DF40-1B9F-48AE-A782-32F07490D82F}" type="datetimeFigureOut">
               <a:rPr lang="fr-FR" smtClean="0"/>
-              <a:t>26/08/2024</a:t>
+              <a:t>22/06/2026</a:t>
             </a:fld>
             <a:endParaRPr lang="fr-FR"/>
           </a:p>
@@ -2996,10 +3077,9 @@
           <a:lstStyle/>
           <a:p>
             <a:r>
-              <a:rPr lang="fr-FR" b="1" dirty="0" smtClean="0"/>
+              <a:rPr lang="fr-FR" b="1" dirty="0"/>
               <a:t>TP Buck</a:t>
             </a:r>
-            <a:endParaRPr lang="fr-FR" b="1" dirty="0"/>
           </a:p>
         </p:txBody>
       </p:sp>
@@ -3033,37 +3113,884 @@
           <a:chExt cx="0" cy="0"/>
         </a:xfrm>
       </p:grpSpPr>
+      <p:pic>
+        <p:nvPicPr>
+          <p:cNvPr id="4" name="Image 3"/>
+          <p:cNvPicPr>
+            <a:picLocks noChangeAspect="1"/>
+          </p:cNvPicPr>
+          <p:nvPr/>
+        </p:nvPicPr>
+        <p:blipFill>
+          <a:blip r:embed="rId2"/>
+          <a:stretch>
+            <a:fillRect/>
+          </a:stretch>
+        </p:blipFill>
+        <p:spPr>
+          <a:xfrm>
+            <a:off x="551676" y="771154"/>
+            <a:ext cx="11088647" cy="5315692"/>
+          </a:xfrm>
+          <a:prstGeom prst="rect">
+            <a:avLst/>
+          </a:prstGeom>
+        </p:spPr>
+      </p:pic>
+      <p:cxnSp>
+        <p:nvCxnSpPr>
+          <p:cNvPr id="6" name="Connecteur droit avec flèche 5"/>
+          <p:cNvCxnSpPr/>
+          <p:nvPr/>
+        </p:nvCxnSpPr>
+        <p:spPr>
+          <a:xfrm>
+            <a:off x="6311900" y="1949450"/>
+            <a:ext cx="104775" cy="0"/>
+          </a:xfrm>
+          <a:prstGeom prst="straightConnector1">
+            <a:avLst/>
+          </a:prstGeom>
+          <a:ln w="57150">
+            <a:solidFill>
+              <a:schemeClr val="tx1"/>
+            </a:solidFill>
+            <a:tailEnd type="triangle"/>
+          </a:ln>
+        </p:spPr>
+        <p:style>
+          <a:lnRef idx="1">
+            <a:schemeClr val="accent1"/>
+          </a:lnRef>
+          <a:fillRef idx="0">
+            <a:schemeClr val="accent1"/>
+          </a:fillRef>
+          <a:effectRef idx="0">
+            <a:schemeClr val="accent1"/>
+          </a:effectRef>
+          <a:fontRef idx="minor">
+            <a:schemeClr val="tx1"/>
+          </a:fontRef>
+        </p:style>
+      </p:cxnSp>
       <p:sp>
         <p:nvSpPr>
-          <p:cNvPr id="2" name="Titre 1"/>
-          <p:cNvSpPr>
-            <a:spLocks noGrp="1"/>
-          </p:cNvSpPr>
-          <p:nvPr>
-            <p:ph type="ctrTitle"/>
-          </p:nvPr>
+          <p:cNvPr id="10" name="ZoneTexte 9"/>
+          <p:cNvSpPr txBox="1"/>
+          <p:nvPr/>
         </p:nvSpPr>
-        <p:spPr/>
+        <p:spPr>
+          <a:xfrm>
+            <a:off x="6182186" y="1487785"/>
+            <a:ext cx="330540" cy="400110"/>
+          </a:xfrm>
+          <a:prstGeom prst="rect">
+            <a:avLst/>
+          </a:prstGeom>
+          <a:noFill/>
+        </p:spPr>
         <p:txBody>
-          <a:bodyPr/>
+          <a:bodyPr wrap="none" rtlCol="0">
+            <a:spAutoFit/>
+          </a:bodyPr>
           <a:lstStyle/>
           <a:p>
             <a:r>
-              <a:rPr lang="fr-FR" b="1" dirty="0" smtClean="0"/>
-              <a:t>TP </a:t>
-            </a:r>
-            <a:r>
-              <a:rPr lang="fr-FR" b="1" dirty="0" err="1" smtClean="0"/>
-              <a:t>Forward</a:t>
-            </a:r>
-            <a:endParaRPr lang="fr-FR" b="1" dirty="0"/>
+              <a:rPr lang="fr-FR" sz="2000" b="1" dirty="0"/>
+              <a:t>i</a:t>
+            </a:r>
+            <a:r>
+              <a:rPr lang="fr-FR" sz="2000" b="1" baseline="-25000" dirty="0"/>
+              <a:t>2</a:t>
+            </a:r>
+          </a:p>
+        </p:txBody>
+      </p:sp>
+      <p:sp>
+        <p:nvSpPr>
+          <p:cNvPr id="11" name="Ellipse 10"/>
+          <p:cNvSpPr/>
+          <p:nvPr/>
+        </p:nvSpPr>
+        <p:spPr>
+          <a:xfrm>
+            <a:off x="6095999" y="4104409"/>
+            <a:ext cx="215901" cy="207818"/>
+          </a:xfrm>
+          <a:prstGeom prst="ellipse">
+            <a:avLst/>
+          </a:prstGeom>
+          <a:solidFill>
+            <a:schemeClr val="tx1"/>
+          </a:solidFill>
+          <a:ln>
+            <a:noFill/>
+          </a:ln>
+        </p:spPr>
+        <p:style>
+          <a:lnRef idx="2">
+            <a:schemeClr val="accent1">
+              <a:shade val="50000"/>
+            </a:schemeClr>
+          </a:lnRef>
+          <a:fillRef idx="1">
+            <a:schemeClr val="accent1"/>
+          </a:fillRef>
+          <a:effectRef idx="0">
+            <a:schemeClr val="accent1"/>
+          </a:effectRef>
+          <a:fontRef idx="minor">
+            <a:schemeClr val="lt1"/>
+          </a:fontRef>
+        </p:style>
+        <p:txBody>
+          <a:bodyPr rtlCol="0" anchor="ctr"/>
+          <a:lstStyle/>
+          <a:p>
+            <a:pPr algn="ctr"/>
+            <a:endParaRPr lang="fr-FR"/>
+          </a:p>
+        </p:txBody>
+      </p:sp>
+      <p:sp>
+        <p:nvSpPr>
+          <p:cNvPr id="12" name="Ellipse 11"/>
+          <p:cNvSpPr/>
+          <p:nvPr/>
+        </p:nvSpPr>
+        <p:spPr>
+          <a:xfrm>
+            <a:off x="3721099" y="4637809"/>
+            <a:ext cx="215901" cy="207818"/>
+          </a:xfrm>
+          <a:prstGeom prst="ellipse">
+            <a:avLst/>
+          </a:prstGeom>
+          <a:solidFill>
+            <a:schemeClr val="tx1"/>
+          </a:solidFill>
+          <a:ln>
+            <a:noFill/>
+          </a:ln>
+        </p:spPr>
+        <p:style>
+          <a:lnRef idx="2">
+            <a:schemeClr val="accent1">
+              <a:shade val="50000"/>
+            </a:schemeClr>
+          </a:lnRef>
+          <a:fillRef idx="1">
+            <a:schemeClr val="accent1"/>
+          </a:fillRef>
+          <a:effectRef idx="0">
+            <a:schemeClr val="accent1"/>
+          </a:effectRef>
+          <a:fontRef idx="minor">
+            <a:schemeClr val="lt1"/>
+          </a:fontRef>
+        </p:style>
+        <p:txBody>
+          <a:bodyPr rtlCol="0" anchor="ctr"/>
+          <a:lstStyle/>
+          <a:p>
+            <a:pPr algn="ctr"/>
+            <a:endParaRPr lang="fr-FR"/>
+          </a:p>
+        </p:txBody>
+      </p:sp>
+      <p:sp>
+        <p:nvSpPr>
+          <p:cNvPr id="13" name="Ellipse 12"/>
+          <p:cNvSpPr/>
+          <p:nvPr/>
+        </p:nvSpPr>
+        <p:spPr>
+          <a:xfrm>
+            <a:off x="4267199" y="4000500"/>
+            <a:ext cx="215901" cy="207818"/>
+          </a:xfrm>
+          <a:prstGeom prst="ellipse">
+            <a:avLst/>
+          </a:prstGeom>
+          <a:solidFill>
+            <a:schemeClr val="tx1"/>
+          </a:solidFill>
+          <a:ln>
+            <a:noFill/>
+          </a:ln>
+        </p:spPr>
+        <p:style>
+          <a:lnRef idx="2">
+            <a:schemeClr val="accent1">
+              <a:shade val="50000"/>
+            </a:schemeClr>
+          </a:lnRef>
+          <a:fillRef idx="1">
+            <a:schemeClr val="accent1"/>
+          </a:fillRef>
+          <a:effectRef idx="0">
+            <a:schemeClr val="accent1"/>
+          </a:effectRef>
+          <a:fontRef idx="minor">
+            <a:schemeClr val="lt1"/>
+          </a:fontRef>
+        </p:style>
+        <p:txBody>
+          <a:bodyPr rtlCol="0" anchor="ctr"/>
+          <a:lstStyle/>
+          <a:p>
+            <a:pPr algn="ctr"/>
+            <a:endParaRPr lang="fr-FR"/>
+          </a:p>
+        </p:txBody>
+      </p:sp>
+      <p:sp>
+        <p:nvSpPr>
+          <p:cNvPr id="14" name="Ellipse 13"/>
+          <p:cNvSpPr/>
+          <p:nvPr/>
+        </p:nvSpPr>
+        <p:spPr>
+          <a:xfrm>
+            <a:off x="4267199" y="1914154"/>
+            <a:ext cx="215901" cy="207818"/>
+          </a:xfrm>
+          <a:prstGeom prst="ellipse">
+            <a:avLst/>
+          </a:prstGeom>
+          <a:solidFill>
+            <a:schemeClr val="tx1"/>
+          </a:solidFill>
+          <a:ln>
+            <a:noFill/>
+          </a:ln>
+        </p:spPr>
+        <p:style>
+          <a:lnRef idx="2">
+            <a:schemeClr val="accent1">
+              <a:shade val="50000"/>
+            </a:schemeClr>
+          </a:lnRef>
+          <a:fillRef idx="1">
+            <a:schemeClr val="accent1"/>
+          </a:fillRef>
+          <a:effectRef idx="0">
+            <a:schemeClr val="accent1"/>
+          </a:effectRef>
+          <a:fontRef idx="minor">
+            <a:schemeClr val="lt1"/>
+          </a:fontRef>
+        </p:style>
+        <p:txBody>
+          <a:bodyPr rtlCol="0" anchor="ctr"/>
+          <a:lstStyle/>
+          <a:p>
+            <a:pPr algn="ctr"/>
+            <a:endParaRPr lang="fr-FR"/>
+          </a:p>
+        </p:txBody>
+      </p:sp>
+      <p:sp>
+        <p:nvSpPr>
+          <p:cNvPr id="15" name="Ellipse 14"/>
+          <p:cNvSpPr/>
+          <p:nvPr/>
+        </p:nvSpPr>
+        <p:spPr>
+          <a:xfrm>
+            <a:off x="6720503" y="1844881"/>
+            <a:ext cx="215901" cy="207818"/>
+          </a:xfrm>
+          <a:prstGeom prst="ellipse">
+            <a:avLst/>
+          </a:prstGeom>
+          <a:solidFill>
+            <a:schemeClr val="tx1"/>
+          </a:solidFill>
+          <a:ln>
+            <a:noFill/>
+          </a:ln>
+        </p:spPr>
+        <p:style>
+          <a:lnRef idx="2">
+            <a:schemeClr val="accent1">
+              <a:shade val="50000"/>
+            </a:schemeClr>
+          </a:lnRef>
+          <a:fillRef idx="1">
+            <a:schemeClr val="accent1"/>
+          </a:fillRef>
+          <a:effectRef idx="0">
+            <a:schemeClr val="accent1"/>
+          </a:effectRef>
+          <a:fontRef idx="minor">
+            <a:schemeClr val="lt1"/>
+          </a:fontRef>
+        </p:style>
+        <p:txBody>
+          <a:bodyPr rtlCol="0" anchor="ctr"/>
+          <a:lstStyle/>
+          <a:p>
+            <a:pPr algn="ctr"/>
+            <a:endParaRPr lang="fr-FR"/>
+          </a:p>
+        </p:txBody>
+      </p:sp>
+      <p:sp>
+        <p:nvSpPr>
+          <p:cNvPr id="17" name="Rectangle 16"/>
+          <p:cNvSpPr/>
+          <p:nvPr/>
+        </p:nvSpPr>
+        <p:spPr>
+          <a:xfrm>
+            <a:off x="10414000" y="5130800"/>
+            <a:ext cx="990600" cy="457200"/>
+          </a:xfrm>
+          <a:prstGeom prst="rect">
+            <a:avLst/>
+          </a:prstGeom>
+          <a:solidFill>
+            <a:schemeClr val="bg1"/>
+          </a:solidFill>
+          <a:ln>
+            <a:noFill/>
+          </a:ln>
+        </p:spPr>
+        <p:style>
+          <a:lnRef idx="2">
+            <a:schemeClr val="accent1">
+              <a:shade val="50000"/>
+            </a:schemeClr>
+          </a:lnRef>
+          <a:fillRef idx="1">
+            <a:schemeClr val="accent1"/>
+          </a:fillRef>
+          <a:effectRef idx="0">
+            <a:schemeClr val="accent1"/>
+          </a:effectRef>
+          <a:fontRef idx="minor">
+            <a:schemeClr val="lt1"/>
+          </a:fontRef>
+        </p:style>
+        <p:txBody>
+          <a:bodyPr rtlCol="0" anchor="ctr"/>
+          <a:lstStyle/>
+          <a:p>
+            <a:pPr algn="ctr"/>
+            <a:endParaRPr lang="fr-FR"/>
+          </a:p>
+        </p:txBody>
+      </p:sp>
+      <p:sp>
+        <p:nvSpPr>
+          <p:cNvPr id="18" name="Ellipse 17"/>
+          <p:cNvSpPr/>
+          <p:nvPr/>
+        </p:nvSpPr>
+        <p:spPr>
+          <a:xfrm>
+            <a:off x="4261427" y="5605317"/>
+            <a:ext cx="215901" cy="207818"/>
+          </a:xfrm>
+          <a:prstGeom prst="ellipse">
+            <a:avLst/>
+          </a:prstGeom>
+          <a:solidFill>
+            <a:schemeClr val="tx1"/>
+          </a:solidFill>
+          <a:ln>
+            <a:noFill/>
+          </a:ln>
+        </p:spPr>
+        <p:style>
+          <a:lnRef idx="2">
+            <a:schemeClr val="accent1">
+              <a:shade val="50000"/>
+            </a:schemeClr>
+          </a:lnRef>
+          <a:fillRef idx="1">
+            <a:schemeClr val="accent1"/>
+          </a:fillRef>
+          <a:effectRef idx="0">
+            <a:schemeClr val="accent1"/>
+          </a:effectRef>
+          <a:fontRef idx="minor">
+            <a:schemeClr val="lt1"/>
+          </a:fontRef>
+        </p:style>
+        <p:txBody>
+          <a:bodyPr rtlCol="0" anchor="ctr"/>
+          <a:lstStyle/>
+          <a:p>
+            <a:pPr algn="ctr"/>
+            <a:endParaRPr lang="fr-FR"/>
+          </a:p>
+        </p:txBody>
+      </p:sp>
+      <p:sp>
+        <p:nvSpPr>
+          <p:cNvPr id="19" name="Rectangle 18"/>
+          <p:cNvSpPr/>
+          <p:nvPr/>
+        </p:nvSpPr>
+        <p:spPr>
+          <a:xfrm>
+            <a:off x="2322946" y="2168154"/>
+            <a:ext cx="392545" cy="951346"/>
+          </a:xfrm>
+          <a:prstGeom prst="rect">
+            <a:avLst/>
+          </a:prstGeom>
+          <a:solidFill>
+            <a:schemeClr val="bg1"/>
+          </a:solidFill>
+          <a:ln>
+            <a:noFill/>
+          </a:ln>
+        </p:spPr>
+        <p:style>
+          <a:lnRef idx="2">
+            <a:schemeClr val="accent1">
+              <a:shade val="50000"/>
+            </a:schemeClr>
+          </a:lnRef>
+          <a:fillRef idx="1">
+            <a:schemeClr val="accent1"/>
+          </a:fillRef>
+          <a:effectRef idx="0">
+            <a:schemeClr val="accent1"/>
+          </a:effectRef>
+          <a:fontRef idx="minor">
+            <a:schemeClr val="lt1"/>
+          </a:fontRef>
+        </p:style>
+        <p:txBody>
+          <a:bodyPr rtlCol="0" anchor="ctr"/>
+          <a:lstStyle/>
+          <a:p>
+            <a:pPr algn="ctr"/>
+            <a:endParaRPr lang="fr-FR"/>
+          </a:p>
+        </p:txBody>
+      </p:sp>
+      <p:sp>
+        <p:nvSpPr>
+          <p:cNvPr id="3" name="ZoneTexte 2"/>
+          <p:cNvSpPr txBox="1"/>
+          <p:nvPr/>
+        </p:nvSpPr>
+        <p:spPr>
+          <a:xfrm>
+            <a:off x="2950443" y="2044535"/>
+            <a:ext cx="700833" cy="400110"/>
+          </a:xfrm>
+          <a:prstGeom prst="rect">
+            <a:avLst/>
+          </a:prstGeom>
+          <a:noFill/>
+        </p:spPr>
+        <p:txBody>
+          <a:bodyPr wrap="none" rtlCol="0">
+            <a:spAutoFit/>
+          </a:bodyPr>
+          <a:lstStyle/>
+          <a:p>
+            <a:r>
+              <a:rPr lang="fr-FR" sz="2000" b="1" dirty="0"/>
+              <a:t>n</a:t>
+            </a:r>
+            <a:r>
+              <a:rPr lang="el-GR" sz="2000" b="1" baseline="-25000" dirty="0"/>
+              <a:t>φ</a:t>
+            </a:r>
+            <a:r>
+              <a:rPr lang="fr-FR" sz="2000" b="1" dirty="0"/>
+              <a:t>=1</a:t>
+            </a:r>
+          </a:p>
+        </p:txBody>
+      </p:sp>
+      <p:cxnSp>
+        <p:nvCxnSpPr>
+          <p:cNvPr id="7" name="Connecteur droit avec flèche 6"/>
+          <p:cNvCxnSpPr/>
+          <p:nvPr/>
+        </p:nvCxnSpPr>
+        <p:spPr>
+          <a:xfrm flipV="1">
+            <a:off x="2715491" y="2168154"/>
+            <a:ext cx="0" cy="1517155"/>
+          </a:xfrm>
+          <a:prstGeom prst="straightConnector1">
+            <a:avLst/>
+          </a:prstGeom>
+          <a:ln w="28575">
+            <a:solidFill>
+              <a:schemeClr val="tx1"/>
+            </a:solidFill>
+            <a:headEnd type="none" w="med" len="med"/>
+            <a:tailEnd type="arrow" w="med" len="med"/>
+          </a:ln>
+        </p:spPr>
+        <p:style>
+          <a:lnRef idx="1">
+            <a:schemeClr val="accent1"/>
+          </a:lnRef>
+          <a:fillRef idx="0">
+            <a:schemeClr val="accent1"/>
+          </a:fillRef>
+          <a:effectRef idx="0">
+            <a:schemeClr val="accent1"/>
+          </a:effectRef>
+          <a:fontRef idx="minor">
+            <a:schemeClr val="tx1"/>
+          </a:fontRef>
+        </p:style>
+      </p:cxnSp>
+      <p:sp>
+        <p:nvSpPr>
+          <p:cNvPr id="8" name="ZoneTexte 7"/>
+          <p:cNvSpPr txBox="1"/>
+          <p:nvPr/>
+        </p:nvSpPr>
+        <p:spPr>
+          <a:xfrm>
+            <a:off x="2127607" y="2274495"/>
+            <a:ext cx="653256" cy="400110"/>
+          </a:xfrm>
+          <a:prstGeom prst="rect">
+            <a:avLst/>
+          </a:prstGeom>
+          <a:noFill/>
+        </p:spPr>
+        <p:txBody>
+          <a:bodyPr wrap="none" rtlCol="0">
+            <a:spAutoFit/>
+          </a:bodyPr>
+          <a:lstStyle/>
+          <a:p>
+            <a:r>
+              <a:rPr lang="fr-FR" sz="2000" b="1" dirty="0"/>
+              <a:t>v</a:t>
+            </a:r>
+            <a:r>
+              <a:rPr lang="fr-FR" sz="2000" b="1" baseline="-25000" dirty="0"/>
+              <a:t>spire</a:t>
+            </a:r>
+          </a:p>
+        </p:txBody>
+      </p:sp>
+      <p:sp>
+        <p:nvSpPr>
+          <p:cNvPr id="20" name="Rectangle 19"/>
+          <p:cNvSpPr/>
+          <p:nvPr/>
+        </p:nvSpPr>
+        <p:spPr>
+          <a:xfrm>
+            <a:off x="1761754" y="2672657"/>
+            <a:ext cx="392545" cy="338200"/>
+          </a:xfrm>
+          <a:prstGeom prst="rect">
+            <a:avLst/>
+          </a:prstGeom>
+          <a:solidFill>
+            <a:schemeClr val="bg1"/>
+          </a:solidFill>
+          <a:ln>
+            <a:noFill/>
+          </a:ln>
+        </p:spPr>
+        <p:style>
+          <a:lnRef idx="2">
+            <a:schemeClr val="accent1">
+              <a:shade val="50000"/>
+            </a:schemeClr>
+          </a:lnRef>
+          <a:fillRef idx="1">
+            <a:schemeClr val="accent1"/>
+          </a:fillRef>
+          <a:effectRef idx="0">
+            <a:schemeClr val="accent1"/>
+          </a:effectRef>
+          <a:fontRef idx="minor">
+            <a:schemeClr val="lt1"/>
+          </a:fontRef>
+        </p:style>
+        <p:txBody>
+          <a:bodyPr rtlCol="0" anchor="ctr"/>
+          <a:lstStyle/>
+          <a:p>
+            <a:pPr algn="ctr"/>
+            <a:endParaRPr lang="fr-FR"/>
+          </a:p>
+        </p:txBody>
+      </p:sp>
+      <p:sp>
+        <p:nvSpPr>
+          <p:cNvPr id="9" name="Rectangle 8"/>
+          <p:cNvSpPr/>
+          <p:nvPr/>
+        </p:nvSpPr>
+        <p:spPr>
+          <a:xfrm>
+            <a:off x="1907448" y="3620777"/>
+            <a:ext cx="574324" cy="400110"/>
+          </a:xfrm>
+          <a:prstGeom prst="rect">
+            <a:avLst/>
+          </a:prstGeom>
+        </p:spPr>
+        <p:txBody>
+          <a:bodyPr wrap="none">
+            <a:spAutoFit/>
+          </a:bodyPr>
+          <a:lstStyle/>
+          <a:p>
+            <a:r>
+              <a:rPr lang="fr-FR" sz="2000" b="1" dirty="0"/>
+              <a:t>v</a:t>
+            </a:r>
+            <a:r>
+              <a:rPr lang="fr-FR" sz="2000" b="1" baseline="-25000" dirty="0"/>
+              <a:t>flux</a:t>
+            </a:r>
+            <a:endParaRPr lang="fr-FR" sz="2000" dirty="0"/>
+          </a:p>
+        </p:txBody>
+      </p:sp>
+      <p:sp>
+        <p:nvSpPr>
+          <p:cNvPr id="21" name="Rectangle 20"/>
+          <p:cNvSpPr/>
+          <p:nvPr/>
+        </p:nvSpPr>
+        <p:spPr>
+          <a:xfrm>
+            <a:off x="3455003" y="1610590"/>
+            <a:ext cx="392545" cy="338200"/>
+          </a:xfrm>
+          <a:prstGeom prst="rect">
+            <a:avLst/>
+          </a:prstGeom>
+          <a:solidFill>
+            <a:schemeClr val="bg1"/>
+          </a:solidFill>
+          <a:ln>
+            <a:noFill/>
+          </a:ln>
+        </p:spPr>
+        <p:style>
+          <a:lnRef idx="2">
+            <a:schemeClr val="accent1">
+              <a:shade val="50000"/>
+            </a:schemeClr>
+          </a:lnRef>
+          <a:fillRef idx="1">
+            <a:schemeClr val="accent1"/>
+          </a:fillRef>
+          <a:effectRef idx="0">
+            <a:schemeClr val="accent1"/>
+          </a:effectRef>
+          <a:fontRef idx="minor">
+            <a:schemeClr val="lt1"/>
+          </a:fontRef>
+        </p:style>
+        <p:txBody>
+          <a:bodyPr rtlCol="0" anchor="ctr"/>
+          <a:lstStyle/>
+          <a:p>
+            <a:pPr algn="ctr"/>
+            <a:endParaRPr lang="fr-FR"/>
+          </a:p>
+        </p:txBody>
+      </p:sp>
+      <p:sp>
+        <p:nvSpPr>
+          <p:cNvPr id="22" name="Rectangle 21"/>
+          <p:cNvSpPr/>
+          <p:nvPr/>
+        </p:nvSpPr>
+        <p:spPr>
+          <a:xfrm>
+            <a:off x="3721099" y="2742065"/>
+            <a:ext cx="393056" cy="400110"/>
+          </a:xfrm>
+          <a:prstGeom prst="rect">
+            <a:avLst/>
+          </a:prstGeom>
+        </p:spPr>
+        <p:txBody>
+          <a:bodyPr wrap="none">
+            <a:spAutoFit/>
+          </a:bodyPr>
+          <a:lstStyle/>
+          <a:p>
+            <a:r>
+              <a:rPr lang="fr-FR" sz="2000" b="1" dirty="0"/>
+              <a:t>v</a:t>
+            </a:r>
+            <a:r>
+              <a:rPr lang="fr-FR" sz="2000" b="1" baseline="-25000" dirty="0"/>
+              <a:t>1</a:t>
+            </a:r>
+            <a:endParaRPr lang="fr-FR" sz="2000" baseline="-25000" dirty="0"/>
+          </a:p>
+        </p:txBody>
+      </p:sp>
+      <p:sp>
+        <p:nvSpPr>
+          <p:cNvPr id="23" name="Rectangle 22"/>
+          <p:cNvSpPr/>
+          <p:nvPr/>
+        </p:nvSpPr>
+        <p:spPr>
+          <a:xfrm>
+            <a:off x="5750385" y="2726676"/>
+            <a:ext cx="393056" cy="400110"/>
+          </a:xfrm>
+          <a:prstGeom prst="rect">
+            <a:avLst/>
+          </a:prstGeom>
+        </p:spPr>
+        <p:txBody>
+          <a:bodyPr wrap="none">
+            <a:spAutoFit/>
+          </a:bodyPr>
+          <a:lstStyle/>
+          <a:p>
+            <a:r>
+              <a:rPr lang="fr-FR" sz="2000" b="1" dirty="0"/>
+              <a:t>v</a:t>
+            </a:r>
+            <a:r>
+              <a:rPr lang="fr-FR" sz="2000" b="1" baseline="-25000" dirty="0"/>
+              <a:t>2</a:t>
+            </a:r>
+            <a:endParaRPr lang="fr-FR" sz="2000" baseline="-25000" dirty="0"/>
+          </a:p>
+        </p:txBody>
+      </p:sp>
+      <p:sp>
+        <p:nvSpPr>
+          <p:cNvPr id="24" name="Rectangle 23"/>
+          <p:cNvSpPr/>
+          <p:nvPr/>
+        </p:nvSpPr>
+        <p:spPr>
+          <a:xfrm>
+            <a:off x="5543024" y="1594344"/>
+            <a:ext cx="392545" cy="338200"/>
+          </a:xfrm>
+          <a:prstGeom prst="rect">
+            <a:avLst/>
+          </a:prstGeom>
+          <a:solidFill>
+            <a:schemeClr val="bg1"/>
+          </a:solidFill>
+          <a:ln>
+            <a:noFill/>
+          </a:ln>
+        </p:spPr>
+        <p:style>
+          <a:lnRef idx="2">
+            <a:schemeClr val="accent1">
+              <a:shade val="50000"/>
+            </a:schemeClr>
+          </a:lnRef>
+          <a:fillRef idx="1">
+            <a:schemeClr val="accent1"/>
+          </a:fillRef>
+          <a:effectRef idx="0">
+            <a:schemeClr val="accent1"/>
+          </a:effectRef>
+          <a:fontRef idx="minor">
+            <a:schemeClr val="lt1"/>
+          </a:fontRef>
+        </p:style>
+        <p:txBody>
+          <a:bodyPr rtlCol="0" anchor="ctr"/>
+          <a:lstStyle/>
+          <a:p>
+            <a:pPr algn="ctr"/>
+            <a:endParaRPr lang="fr-FR"/>
+          </a:p>
+        </p:txBody>
+      </p:sp>
+      <p:cxnSp>
+        <p:nvCxnSpPr>
+          <p:cNvPr id="25" name="Connecteur droit avec flèche 24"/>
+          <p:cNvCxnSpPr/>
+          <p:nvPr/>
+        </p:nvCxnSpPr>
+        <p:spPr>
+          <a:xfrm>
+            <a:off x="4391024" y="1266824"/>
+            <a:ext cx="0" cy="157586"/>
+          </a:xfrm>
+          <a:prstGeom prst="straightConnector1">
+            <a:avLst/>
+          </a:prstGeom>
+          <a:ln w="57150">
+            <a:solidFill>
+              <a:schemeClr val="tx1"/>
+            </a:solidFill>
+            <a:tailEnd type="triangle"/>
+          </a:ln>
+        </p:spPr>
+        <p:style>
+          <a:lnRef idx="1">
+            <a:schemeClr val="accent1"/>
+          </a:lnRef>
+          <a:fillRef idx="0">
+            <a:schemeClr val="accent1"/>
+          </a:fillRef>
+          <a:effectRef idx="0">
+            <a:schemeClr val="accent1"/>
+          </a:effectRef>
+          <a:fontRef idx="minor">
+            <a:schemeClr val="tx1"/>
+          </a:fontRef>
+        </p:style>
+      </p:cxnSp>
+      <p:sp>
+        <p:nvSpPr>
+          <p:cNvPr id="28" name="ZoneTexte 27"/>
+          <p:cNvSpPr txBox="1"/>
+          <p:nvPr/>
+        </p:nvSpPr>
+        <p:spPr>
+          <a:xfrm>
+            <a:off x="4472372" y="1194234"/>
+            <a:ext cx="330540" cy="400110"/>
+          </a:xfrm>
+          <a:prstGeom prst="rect">
+            <a:avLst/>
+          </a:prstGeom>
+          <a:noFill/>
+        </p:spPr>
+        <p:txBody>
+          <a:bodyPr wrap="none" rtlCol="0">
+            <a:spAutoFit/>
+          </a:bodyPr>
+          <a:lstStyle/>
+          <a:p>
+            <a:r>
+              <a:rPr lang="fr-FR" sz="2000" b="1" dirty="0"/>
+              <a:t>i</a:t>
+            </a:r>
+            <a:r>
+              <a:rPr lang="fr-FR" sz="2000" b="1" baseline="-25000" dirty="0"/>
+              <a:t>1</a:t>
+            </a:r>
           </a:p>
         </p:txBody>
       </p:sp>
     </p:spTree>
     <p:extLst>
       <p:ext uri="{BB962C8B-B14F-4D97-AF65-F5344CB8AC3E}">
-        <p14:creationId xmlns:p14="http://schemas.microsoft.com/office/powerpoint/2010/main" val="3667489403"/>
+        <p14:creationId xmlns:p14="http://schemas.microsoft.com/office/powerpoint/2010/main" val="3674708944"/>
       </p:ext>
     </p:extLst>
   </p:cSld>
@@ -3090,6 +4017,63 @@
           <a:chExt cx="0" cy="0"/>
         </a:xfrm>
       </p:grpSpPr>
+      <p:sp>
+        <p:nvSpPr>
+          <p:cNvPr id="2" name="Titre 1"/>
+          <p:cNvSpPr>
+            <a:spLocks noGrp="1"/>
+          </p:cNvSpPr>
+          <p:nvPr>
+            <p:ph type="ctrTitle"/>
+          </p:nvPr>
+        </p:nvSpPr>
+        <p:spPr/>
+        <p:txBody>
+          <a:bodyPr/>
+          <a:lstStyle/>
+          <a:p>
+            <a:r>
+              <a:rPr lang="fr-FR" b="1" dirty="0"/>
+              <a:t>TP </a:t>
+            </a:r>
+            <a:r>
+              <a:rPr lang="fr-FR" b="1" dirty="0" err="1"/>
+              <a:t>Forward</a:t>
+            </a:r>
+            <a:endParaRPr lang="fr-FR" b="1" dirty="0"/>
+          </a:p>
+        </p:txBody>
+      </p:sp>
+    </p:spTree>
+    <p:extLst>
+      <p:ext uri="{BB962C8B-B14F-4D97-AF65-F5344CB8AC3E}">
+        <p14:creationId xmlns:p14="http://schemas.microsoft.com/office/powerpoint/2010/main" val="3667489403"/>
+      </p:ext>
+    </p:extLst>
+  </p:cSld>
+  <p:clrMapOvr>
+    <a:masterClrMapping/>
+  </p:clrMapOvr>
+</p:sld>
+</file>
+
+<file path=ppt/slides/slide12.xml><?xml version="1.0" encoding="utf-8"?>
+<p:sld xmlns:a="http://schemas.openxmlformats.org/drawingml/2006/main" xmlns:r="http://schemas.openxmlformats.org/officeDocument/2006/relationships" xmlns:p="http://schemas.openxmlformats.org/presentationml/2006/main">
+  <p:cSld>
+    <p:spTree>
+      <p:nvGrpSpPr>
+        <p:cNvPr id="1" name=""/>
+        <p:cNvGrpSpPr/>
+        <p:nvPr/>
+      </p:nvGrpSpPr>
+      <p:grpSpPr>
+        <a:xfrm>
+          <a:off x="0" y="0"/>
+          <a:ext cx="0" cy="0"/>
+          <a:chOff x="0" y="0"/>
+          <a:chExt cx="0" cy="0"/>
+        </a:xfrm>
+      </p:grpSpPr>
       <p:pic>
         <p:nvPicPr>
           <p:cNvPr id="4" name="Image 3"/>
@@ -3734,11 +4718,11 @@
           <a:lstStyle/>
           <a:p>
             <a:r>
-              <a:rPr lang="fr-FR" sz="2000" b="1" dirty="0" smtClean="0"/>
+              <a:rPr lang="fr-FR" sz="2000" b="1" dirty="0"/>
               <a:t>v</a:t>
             </a:r>
             <a:r>
-              <a:rPr lang="fr-FR" sz="2000" b="1" baseline="-25000" dirty="0" smtClean="0"/>
+              <a:rPr lang="fr-FR" sz="2000" b="1" baseline="-25000" dirty="0"/>
               <a:t>flux</a:t>
             </a:r>
             <a:endParaRPr lang="fr-FR" sz="2000" dirty="0"/>
@@ -3851,14 +4835,13 @@
           <a:lstStyle/>
           <a:p>
             <a:r>
-              <a:rPr lang="fr-FR" sz="2000" b="1" dirty="0" smtClean="0"/>
+              <a:rPr lang="fr-FR" sz="2000" b="1" dirty="0"/>
               <a:t>v</a:t>
             </a:r>
             <a:r>
-              <a:rPr lang="fr-FR" sz="2000" b="1" baseline="-25000" dirty="0" smtClean="0"/>
+              <a:rPr lang="fr-FR" sz="2000" b="1" baseline="-25000" dirty="0"/>
               <a:t>spire</a:t>
             </a:r>
-            <a:endParaRPr lang="fr-FR" sz="2000" b="1" baseline="-25000" dirty="0"/>
           </a:p>
         </p:txBody>
       </p:sp>
@@ -3889,14 +4872,13 @@
               <a:t>n</a:t>
             </a:r>
             <a:r>
-              <a:rPr lang="el-GR" sz="2000" b="1" baseline="-25000" dirty="0" smtClean="0"/>
+              <a:rPr lang="el-GR" sz="2000" b="1" baseline="-25000" dirty="0"/>
               <a:t>φ</a:t>
             </a:r>
             <a:r>
-              <a:rPr lang="fr-FR" sz="2000" b="1" dirty="0" smtClean="0"/>
+              <a:rPr lang="fr-FR" sz="2000" b="1" dirty="0"/>
               <a:t>=1</a:t>
             </a:r>
-            <a:endParaRPr lang="fr-FR" sz="2000" b="1" dirty="0"/>
           </a:p>
         </p:txBody>
       </p:sp>
@@ -3959,14 +4941,13 @@
           <a:lstStyle/>
           <a:p>
             <a:r>
-              <a:rPr lang="fr-FR" sz="2000" b="1" dirty="0" smtClean="0"/>
+              <a:rPr lang="fr-FR" sz="2000" b="1" dirty="0"/>
               <a:t>i</a:t>
             </a:r>
             <a:r>
-              <a:rPr lang="fr-FR" sz="2000" b="1" baseline="-25000" dirty="0" smtClean="0"/>
+              <a:rPr lang="fr-FR" sz="2000" b="1" baseline="-25000" dirty="0"/>
               <a:t>2</a:t>
             </a:r>
-            <a:endParaRPr lang="fr-FR" sz="2000" b="1" baseline="-25000" dirty="0"/>
           </a:p>
         </p:txBody>
       </p:sp>
@@ -4029,14 +5010,13 @@
           <a:lstStyle/>
           <a:p>
             <a:r>
-              <a:rPr lang="fr-FR" sz="2000" b="1" dirty="0" smtClean="0"/>
+              <a:rPr lang="fr-FR" sz="2000" b="1" dirty="0"/>
               <a:t>i</a:t>
             </a:r>
             <a:r>
-              <a:rPr lang="fr-FR" sz="2000" b="1" baseline="-25000" dirty="0" smtClean="0"/>
+              <a:rPr lang="fr-FR" sz="2000" b="1" baseline="-25000" dirty="0"/>
               <a:t>1</a:t>
             </a:r>
-            <a:endParaRPr lang="fr-FR" sz="2000" b="1" baseline="-25000" dirty="0"/>
           </a:p>
         </p:txBody>
       </p:sp>
@@ -4099,14 +5079,13 @@
           <a:lstStyle/>
           <a:p>
             <a:r>
-              <a:rPr lang="fr-FR" sz="2000" b="1" dirty="0" smtClean="0"/>
+              <a:rPr lang="fr-FR" sz="2000" b="1" dirty="0"/>
               <a:t>i</a:t>
             </a:r>
             <a:r>
-              <a:rPr lang="fr-FR" sz="2000" b="1" baseline="-25000" dirty="0" smtClean="0"/>
+              <a:rPr lang="fr-FR" sz="2000" b="1" baseline="-25000" dirty="0"/>
               <a:t>3</a:t>
             </a:r>
-            <a:endParaRPr lang="fr-FR" sz="2000" b="1" baseline="-25000" dirty="0"/>
           </a:p>
         </p:txBody>
       </p:sp>
@@ -4123,7 +5102,7 @@
 </p:sld>
 </file>
 
-<file path=ppt/slides/slide12.xml><?xml version="1.0" encoding="utf-8"?>
+<file path=ppt/slides/slide13.xml><?xml version="1.0" encoding="utf-8"?>
 <p:sld xmlns:a="http://schemas.openxmlformats.org/drawingml/2006/main" xmlns:r="http://schemas.openxmlformats.org/officeDocument/2006/relationships" xmlns:p="http://schemas.openxmlformats.org/presentationml/2006/main">
   <p:cSld>
     <p:spTree>
@@ -4592,7 +5571,7 @@
           <a:lstStyle/>
           <a:p>
             <a:r>
-              <a:rPr lang="el-GR" sz="1276" b="1" dirty="0" smtClean="0"/>
+              <a:rPr lang="el-GR" sz="1276" b="1" dirty="0"/>
               <a:t>ϕ</a:t>
             </a:r>
             <a:endParaRPr lang="fr-FR" sz="1276" b="1" dirty="0"/>
@@ -4746,14 +5725,13 @@
           <a:lstStyle/>
           <a:p>
             <a:r>
-              <a:rPr lang="fr-FR" sz="1276" b="1" dirty="0" smtClean="0"/>
+              <a:rPr lang="fr-FR" sz="1276" b="1" dirty="0"/>
               <a:t>i</a:t>
             </a:r>
             <a:r>
-              <a:rPr lang="fr-FR" sz="1276" b="1" baseline="-25000" dirty="0" smtClean="0"/>
+              <a:rPr lang="fr-FR" sz="1276" b="1" baseline="-25000" dirty="0"/>
               <a:t>1</a:t>
             </a:r>
-            <a:endParaRPr lang="fr-FR" sz="1276" b="1" baseline="-25000" dirty="0"/>
           </a:p>
         </p:txBody>
       </p:sp>
@@ -5028,14 +6006,13 @@
           <a:lstStyle/>
           <a:p>
             <a:r>
-              <a:rPr lang="fr-FR" sz="1276" b="1" dirty="0" smtClean="0"/>
+              <a:rPr lang="fr-FR" sz="1276" b="1" dirty="0"/>
               <a:t>v</a:t>
             </a:r>
             <a:r>
-              <a:rPr lang="fr-FR" sz="1276" b="1" baseline="-25000" dirty="0" smtClean="0"/>
+              <a:rPr lang="fr-FR" sz="1276" b="1" baseline="-25000" dirty="0"/>
               <a:t>2</a:t>
             </a:r>
-            <a:endParaRPr lang="fr-FR" sz="1276" b="1" baseline="-25000" dirty="0"/>
           </a:p>
         </p:txBody>
       </p:sp>
@@ -5415,7 +6392,7 @@
           <a:lstStyle/>
           <a:p>
             <a:r>
-              <a:rPr lang="fr-FR" sz="1276" b="1" dirty="0" smtClean="0"/>
+              <a:rPr lang="fr-FR" sz="1276" b="1" dirty="0"/>
               <a:t>i</a:t>
             </a:r>
             <a:r>
@@ -6035,18 +7012,13 @@
           <a:lstStyle/>
           <a:p>
             <a:r>
-              <a:rPr lang="fr-FR" b="1" dirty="0" smtClean="0">
+              <a:rPr lang="fr-FR" b="1" dirty="0">
                 <a:solidFill>
                   <a:srgbClr val="FF0000"/>
                 </a:solidFill>
               </a:rPr>
               <a:t>Components</a:t>
             </a:r>
-            <a:endParaRPr lang="fr-FR" b="1" dirty="0">
-              <a:solidFill>
-                <a:srgbClr val="FF0000"/>
-              </a:solidFill>
-            </a:endParaRPr>
           </a:p>
         </p:txBody>
       </p:sp>
@@ -6111,7 +7083,7 @@
           <a:lstStyle/>
           <a:p>
             <a:r>
-              <a:rPr lang="fr-FR" b="1" dirty="0" err="1" smtClean="0">
+              <a:rPr lang="fr-FR" b="1" dirty="0" err="1">
                 <a:solidFill>
                   <a:schemeClr val="accent5"/>
                 </a:solidFill>
@@ -6119,18 +7091,13 @@
               <a:t>Run</a:t>
             </a:r>
             <a:r>
-              <a:rPr lang="fr-FR" b="1" dirty="0" smtClean="0">
+              <a:rPr lang="fr-FR" b="1" dirty="0">
                 <a:solidFill>
                   <a:schemeClr val="accent5"/>
                 </a:solidFill>
               </a:rPr>
               <a:t> simulation</a:t>
             </a:r>
-            <a:endParaRPr lang="fr-FR" b="1" dirty="0">
-              <a:solidFill>
-                <a:schemeClr val="accent5"/>
-              </a:solidFill>
-            </a:endParaRPr>
           </a:p>
         </p:txBody>
       </p:sp>
@@ -6218,7 +7185,7 @@
           <a:p>
             <a:pPr algn="ctr"/>
             <a:r>
-              <a:rPr lang="fr-FR" b="1" dirty="0" smtClean="0">
+              <a:rPr lang="fr-FR" b="1" dirty="0">
                 <a:solidFill>
                   <a:schemeClr val="accent6"/>
                 </a:solidFill>
@@ -6229,7 +7196,7 @@
           <a:p>
             <a:pPr algn="ctr"/>
             <a:r>
-              <a:rPr lang="fr-FR" b="1" dirty="0" err="1" smtClean="0">
+              <a:rPr lang="fr-FR" b="1" dirty="0" err="1">
                 <a:solidFill>
                   <a:schemeClr val="accent6"/>
                 </a:solidFill>
@@ -6237,18 +7204,13 @@
               <a:t>edit</a:t>
             </a:r>
             <a:r>
-              <a:rPr lang="fr-FR" b="1" dirty="0" smtClean="0">
+              <a:rPr lang="fr-FR" b="1" dirty="0">
                 <a:solidFill>
                   <a:schemeClr val="accent6"/>
                 </a:solidFill>
               </a:rPr>
               <a:t> component</a:t>
             </a:r>
-            <a:endParaRPr lang="fr-FR" b="1" dirty="0">
-              <a:solidFill>
-                <a:schemeClr val="accent6"/>
-              </a:solidFill>
-            </a:endParaRPr>
           </a:p>
         </p:txBody>
       </p:sp>
@@ -6312,7 +7274,7 @@
           <a:p>
             <a:pPr algn="ctr"/>
             <a:r>
-              <a:rPr lang="fr-FR" b="1" dirty="0" smtClean="0">
+              <a:rPr lang="fr-FR" b="1" dirty="0">
                 <a:solidFill>
                   <a:schemeClr val="accent2"/>
                 </a:solidFill>
@@ -6323,18 +7285,13 @@
           <a:p>
             <a:pPr algn="ctr"/>
             <a:r>
-              <a:rPr lang="fr-FR" b="1" dirty="0" smtClean="0">
+              <a:rPr lang="fr-FR" b="1" dirty="0">
                 <a:solidFill>
                   <a:schemeClr val="accent2"/>
                 </a:solidFill>
               </a:rPr>
               <a:t>(simulation type)</a:t>
             </a:r>
-            <a:endParaRPr lang="fr-FR" b="1" dirty="0">
-              <a:solidFill>
-                <a:schemeClr val="accent2"/>
-              </a:solidFill>
-            </a:endParaRPr>
           </a:p>
         </p:txBody>
       </p:sp>
@@ -6368,6 +7325,371 @@
           <a:chExt cx="0" cy="0"/>
         </a:xfrm>
       </p:grpSpPr>
+      <p:pic>
+        <p:nvPicPr>
+          <p:cNvPr id="5" name="Image 4">
+            <a:extLst>
+              <a:ext uri="{FF2B5EF4-FFF2-40B4-BE49-F238E27FC236}">
+                <a16:creationId xmlns:a16="http://schemas.microsoft.com/office/drawing/2014/main" id="{623DD589-21DB-BE1D-BC4E-631AAFC2B525}"/>
+              </a:ext>
+            </a:extLst>
+          </p:cNvPr>
+          <p:cNvPicPr>
+            <a:picLocks noChangeAspect="1"/>
+          </p:cNvPicPr>
+          <p:nvPr/>
+        </p:nvPicPr>
+        <p:blipFill>
+          <a:blip r:embed="rId2"/>
+          <a:srcRect l="19738" t="7192" r="19655" b="7060"/>
+          <a:stretch>
+            <a:fillRect/>
+          </a:stretch>
+        </p:blipFill>
+        <p:spPr>
+          <a:xfrm>
+            <a:off x="1543985" y="267494"/>
+            <a:ext cx="9368853" cy="6323011"/>
+          </a:xfrm>
+          <a:prstGeom prst="rect">
+            <a:avLst/>
+          </a:prstGeom>
+        </p:spPr>
+      </p:pic>
+      <p:sp>
+        <p:nvSpPr>
+          <p:cNvPr id="6" name="Rectangle : coins arrondis 5">
+            <a:extLst>
+              <a:ext uri="{FF2B5EF4-FFF2-40B4-BE49-F238E27FC236}">
+                <a16:creationId xmlns:a16="http://schemas.microsoft.com/office/drawing/2014/main" id="{5A8B524F-3386-6B34-99D0-1E169D38B9CE}"/>
+              </a:ext>
+            </a:extLst>
+          </p:cNvPr>
+          <p:cNvSpPr/>
+          <p:nvPr/>
+        </p:nvSpPr>
+        <p:spPr>
+          <a:xfrm>
+            <a:off x="7000407" y="2653258"/>
+            <a:ext cx="1034322" cy="1588957"/>
+          </a:xfrm>
+          <a:prstGeom prst="roundRect">
+            <a:avLst/>
+          </a:prstGeom>
+          <a:noFill/>
+          <a:ln w="57150">
+            <a:solidFill>
+              <a:schemeClr val="accent2"/>
+            </a:solidFill>
+          </a:ln>
+        </p:spPr>
+        <p:style>
+          <a:lnRef idx="2">
+            <a:schemeClr val="accent1">
+              <a:shade val="15000"/>
+            </a:schemeClr>
+          </a:lnRef>
+          <a:fillRef idx="1">
+            <a:schemeClr val="accent1"/>
+          </a:fillRef>
+          <a:effectRef idx="0">
+            <a:schemeClr val="accent1"/>
+          </a:effectRef>
+          <a:fontRef idx="minor">
+            <a:schemeClr val="lt1"/>
+          </a:fontRef>
+        </p:style>
+        <p:txBody>
+          <a:bodyPr rtlCol="0" anchor="ctr"/>
+          <a:lstStyle/>
+          <a:p>
+            <a:pPr algn="ctr"/>
+            <a:endParaRPr lang="fr-FR"/>
+          </a:p>
+        </p:txBody>
+      </p:sp>
+      <p:sp>
+        <p:nvSpPr>
+          <p:cNvPr id="7" name="Rectangle : coins arrondis 6">
+            <a:extLst>
+              <a:ext uri="{FF2B5EF4-FFF2-40B4-BE49-F238E27FC236}">
+                <a16:creationId xmlns:a16="http://schemas.microsoft.com/office/drawing/2014/main" id="{1844C822-5825-7289-F48C-0D943F099511}"/>
+              </a:ext>
+            </a:extLst>
+          </p:cNvPr>
+          <p:cNvSpPr/>
+          <p:nvPr/>
+        </p:nvSpPr>
+        <p:spPr>
+          <a:xfrm>
+            <a:off x="7842354" y="2071141"/>
+            <a:ext cx="1616439" cy="806969"/>
+          </a:xfrm>
+          <a:prstGeom prst="roundRect">
+            <a:avLst/>
+          </a:prstGeom>
+          <a:noFill/>
+          <a:ln w="57150">
+            <a:solidFill>
+              <a:schemeClr val="accent2"/>
+            </a:solidFill>
+          </a:ln>
+        </p:spPr>
+        <p:style>
+          <a:lnRef idx="2">
+            <a:schemeClr val="accent1">
+              <a:shade val="15000"/>
+            </a:schemeClr>
+          </a:lnRef>
+          <a:fillRef idx="1">
+            <a:schemeClr val="accent1"/>
+          </a:fillRef>
+          <a:effectRef idx="0">
+            <a:schemeClr val="accent1"/>
+          </a:effectRef>
+          <a:fontRef idx="minor">
+            <a:schemeClr val="lt1"/>
+          </a:fontRef>
+        </p:style>
+        <p:txBody>
+          <a:bodyPr rtlCol="0" anchor="ctr"/>
+          <a:lstStyle/>
+          <a:p>
+            <a:pPr algn="ctr"/>
+            <a:endParaRPr lang="fr-FR"/>
+          </a:p>
+        </p:txBody>
+      </p:sp>
+      <p:sp>
+        <p:nvSpPr>
+          <p:cNvPr id="8" name="ZoneTexte 7">
+            <a:extLst>
+              <a:ext uri="{FF2B5EF4-FFF2-40B4-BE49-F238E27FC236}">
+                <a16:creationId xmlns:a16="http://schemas.microsoft.com/office/drawing/2014/main" id="{E1319278-42B0-44F8-C96F-1366EC95D0D8}"/>
+              </a:ext>
+            </a:extLst>
+          </p:cNvPr>
+          <p:cNvSpPr txBox="1"/>
+          <p:nvPr/>
+        </p:nvSpPr>
+        <p:spPr>
+          <a:xfrm>
+            <a:off x="8912901" y="1673608"/>
+            <a:ext cx="2006185" cy="830997"/>
+          </a:xfrm>
+          <a:prstGeom prst="rect">
+            <a:avLst/>
+          </a:prstGeom>
+          <a:noFill/>
+        </p:spPr>
+        <p:txBody>
+          <a:bodyPr wrap="square" rtlCol="0">
+            <a:spAutoFit/>
+          </a:bodyPr>
+          <a:lstStyle/>
+          <a:p>
+            <a:pPr algn="ctr"/>
+            <a:r>
+              <a:rPr lang="fr-FR" sz="2400" b="1" dirty="0">
+                <a:solidFill>
+                  <a:schemeClr val="accent2"/>
+                </a:solidFill>
+              </a:rPr>
+              <a:t>Measurement of i</a:t>
+            </a:r>
+            <a:r>
+              <a:rPr lang="fr-FR" sz="2400" b="1" baseline="-25000" dirty="0">
+                <a:solidFill>
+                  <a:schemeClr val="accent2"/>
+                </a:solidFill>
+              </a:rPr>
+              <a:t>C1</a:t>
+            </a:r>
+            <a:r>
+              <a:rPr lang="fr-FR" sz="1600" b="1" dirty="0">
+                <a:solidFill>
+                  <a:schemeClr val="accent2"/>
+                </a:solidFill>
+              </a:rPr>
+              <a:t> </a:t>
+            </a:r>
+          </a:p>
+        </p:txBody>
+      </p:sp>
+      <p:sp>
+        <p:nvSpPr>
+          <p:cNvPr id="9" name="ZoneTexte 8">
+            <a:extLst>
+              <a:ext uri="{FF2B5EF4-FFF2-40B4-BE49-F238E27FC236}">
+                <a16:creationId xmlns:a16="http://schemas.microsoft.com/office/drawing/2014/main" id="{A60997E7-0FCD-AC74-3364-84A56E302DC7}"/>
+              </a:ext>
+            </a:extLst>
+          </p:cNvPr>
+          <p:cNvSpPr txBox="1"/>
+          <p:nvPr/>
+        </p:nvSpPr>
+        <p:spPr>
+          <a:xfrm>
+            <a:off x="6028544" y="4143235"/>
+            <a:ext cx="2006185" cy="830997"/>
+          </a:xfrm>
+          <a:prstGeom prst="rect">
+            <a:avLst/>
+          </a:prstGeom>
+          <a:noFill/>
+        </p:spPr>
+        <p:txBody>
+          <a:bodyPr wrap="square" rtlCol="0">
+            <a:spAutoFit/>
+          </a:bodyPr>
+          <a:lstStyle/>
+          <a:p>
+            <a:pPr algn="ctr"/>
+            <a:r>
+              <a:rPr lang="fr-FR" sz="2400" b="1" dirty="0">
+                <a:solidFill>
+                  <a:schemeClr val="accent2"/>
+                </a:solidFill>
+              </a:rPr>
+              <a:t>Measurement of i</a:t>
+            </a:r>
+            <a:r>
+              <a:rPr lang="fr-FR" sz="2400" b="1" baseline="-25000" dirty="0">
+                <a:solidFill>
+                  <a:schemeClr val="accent2"/>
+                </a:solidFill>
+              </a:rPr>
+              <a:t>L1</a:t>
+            </a:r>
+            <a:r>
+              <a:rPr lang="fr-FR" sz="1600" b="1" dirty="0">
+                <a:solidFill>
+                  <a:schemeClr val="accent2"/>
+                </a:solidFill>
+              </a:rPr>
+              <a:t> </a:t>
+            </a:r>
+          </a:p>
+        </p:txBody>
+      </p:sp>
+      <p:cxnSp>
+        <p:nvCxnSpPr>
+          <p:cNvPr id="11" name="Connecteur droit avec flèche 10">
+            <a:extLst>
+              <a:ext uri="{FF2B5EF4-FFF2-40B4-BE49-F238E27FC236}">
+                <a16:creationId xmlns:a16="http://schemas.microsoft.com/office/drawing/2014/main" id="{FB275445-A7FB-30CE-BFE2-39DC2701A19F}"/>
+              </a:ext>
+            </a:extLst>
+          </p:cNvPr>
+          <p:cNvCxnSpPr>
+            <a:cxnSpLocks/>
+          </p:cNvCxnSpPr>
+          <p:nvPr/>
+        </p:nvCxnSpPr>
+        <p:spPr>
+          <a:xfrm>
+            <a:off x="2903721" y="1873770"/>
+            <a:ext cx="693918" cy="1004340"/>
+          </a:xfrm>
+          <a:prstGeom prst="straightConnector1">
+            <a:avLst/>
+          </a:prstGeom>
+          <a:ln w="57150">
+            <a:solidFill>
+              <a:schemeClr val="accent2"/>
+            </a:solidFill>
+            <a:tailEnd type="triangle"/>
+          </a:ln>
+        </p:spPr>
+        <p:style>
+          <a:lnRef idx="1">
+            <a:schemeClr val="accent1"/>
+          </a:lnRef>
+          <a:fillRef idx="0">
+            <a:schemeClr val="accent1"/>
+          </a:fillRef>
+          <a:effectRef idx="0">
+            <a:schemeClr val="accent1"/>
+          </a:effectRef>
+          <a:fontRef idx="minor">
+            <a:schemeClr val="tx1"/>
+          </a:fontRef>
+        </p:style>
+      </p:cxnSp>
+      <p:sp>
+        <p:nvSpPr>
+          <p:cNvPr id="14" name="ZoneTexte 13">
+            <a:extLst>
+              <a:ext uri="{FF2B5EF4-FFF2-40B4-BE49-F238E27FC236}">
+                <a16:creationId xmlns:a16="http://schemas.microsoft.com/office/drawing/2014/main" id="{47A09A54-0967-738F-4E0D-B8BC2472DD70}"/>
+              </a:ext>
+            </a:extLst>
+          </p:cNvPr>
+          <p:cNvSpPr txBox="1"/>
+          <p:nvPr/>
+        </p:nvSpPr>
+        <p:spPr>
+          <a:xfrm>
+            <a:off x="2344088" y="1446604"/>
+            <a:ext cx="6093500" cy="461665"/>
+          </a:xfrm>
+          <a:prstGeom prst="rect">
+            <a:avLst/>
+          </a:prstGeom>
+          <a:noFill/>
+        </p:spPr>
+        <p:txBody>
+          <a:bodyPr wrap="square">
+            <a:spAutoFit/>
+          </a:bodyPr>
+          <a:lstStyle/>
+          <a:p>
+            <a:r>
+              <a:rPr lang="fr-FR" sz="2400" b="1" dirty="0">
+                <a:solidFill>
+                  <a:schemeClr val="accent2"/>
+                </a:solidFill>
+              </a:rPr>
+              <a:t>LT1959</a:t>
+            </a:r>
+            <a:endParaRPr lang="fr-FR" sz="2400" dirty="0">
+              <a:solidFill>
+                <a:schemeClr val="accent2"/>
+              </a:solidFill>
+            </a:endParaRPr>
+          </a:p>
+        </p:txBody>
+      </p:sp>
+    </p:spTree>
+    <p:extLst>
+      <p:ext uri="{BB962C8B-B14F-4D97-AF65-F5344CB8AC3E}">
+        <p14:creationId xmlns:p14="http://schemas.microsoft.com/office/powerpoint/2010/main" val="137391853"/>
+      </p:ext>
+    </p:extLst>
+  </p:cSld>
+  <p:clrMapOvr>
+    <a:masterClrMapping/>
+  </p:clrMapOvr>
+</p:sld>
+</file>
+
+<file path=ppt/slides/slide4.xml><?xml version="1.0" encoding="utf-8"?>
+<p:sld xmlns:a="http://schemas.openxmlformats.org/drawingml/2006/main" xmlns:r="http://schemas.openxmlformats.org/officeDocument/2006/relationships" xmlns:p="http://schemas.openxmlformats.org/presentationml/2006/main">
+  <p:cSld>
+    <p:spTree>
+      <p:nvGrpSpPr>
+        <p:cNvPr id="1" name=""/>
+        <p:cNvGrpSpPr/>
+        <p:nvPr/>
+      </p:nvGrpSpPr>
+      <p:grpSpPr>
+        <a:xfrm>
+          <a:off x="0" y="0"/>
+          <a:ext cx="0" cy="0"/>
+          <a:chOff x="0" y="0"/>
+          <a:chExt cx="0" cy="0"/>
+        </a:xfrm>
+      </p:grpSpPr>
       <p:sp>
         <p:nvSpPr>
           <p:cNvPr id="2" name="Titre 1"/>
@@ -6384,10 +7706,9 @@
           <a:lstStyle/>
           <a:p>
             <a:r>
-              <a:rPr lang="fr-FR" b="1" dirty="0" smtClean="0"/>
+              <a:rPr lang="fr-FR" b="1" dirty="0"/>
               <a:t>TP H4Q</a:t>
             </a:r>
-            <a:endParaRPr lang="fr-FR" b="1" dirty="0"/>
           </a:p>
         </p:txBody>
       </p:sp>
@@ -6404,7 +7725,7 @@
 </p:sld>
 </file>
 
-<file path=ppt/slides/slide4.xml><?xml version="1.0" encoding="utf-8"?>
+<file path=ppt/slides/slide5.xml><?xml version="1.0" encoding="utf-8"?>
 <p:sld xmlns:a="http://schemas.openxmlformats.org/drawingml/2006/main" xmlns:r="http://schemas.openxmlformats.org/officeDocument/2006/relationships" xmlns:p="http://schemas.openxmlformats.org/presentationml/2006/main">
   <p:cSld>
     <p:spTree>
@@ -6877,20 +8198,16 @@
           <a:lstStyle/>
           <a:p>
             <a:r>
-              <a:rPr lang="fr-FR" sz="1276" b="1" dirty="0" smtClean="0"/>
+              <a:rPr lang="fr-FR" sz="1276" b="1" dirty="0"/>
               <a:t>f</a:t>
             </a:r>
             <a:r>
-              <a:rPr lang="fr-FR" sz="1276" b="1" baseline="-25000" dirty="0" smtClean="0"/>
+              <a:rPr lang="fr-FR" sz="1276" b="1" baseline="-25000" dirty="0"/>
               <a:t>2</a:t>
             </a:r>
             <a:r>
-              <a:rPr lang="fr-FR" sz="1276" b="1" dirty="0" smtClean="0"/>
-              <a:t>(t</a:t>
-            </a:r>
-            <a:r>
               <a:rPr lang="fr-FR" sz="1276" b="1" dirty="0"/>
-              <a:t>)</a:t>
+              <a:t>(t)</a:t>
             </a:r>
           </a:p>
         </p:txBody>
@@ -7042,7 +8359,7 @@
           <a:lstStyle/>
           <a:p>
             <a:r>
-              <a:rPr lang="fr-FR" sz="1276" b="1" dirty="0" smtClean="0"/>
+              <a:rPr lang="fr-FR" sz="1276" b="1" dirty="0"/>
               <a:t>f</a:t>
             </a:r>
             <a:r>
@@ -7050,12 +8367,8 @@
               <a:t>3</a:t>
             </a:r>
             <a:r>
-              <a:rPr lang="fr-FR" sz="1276" b="1" dirty="0" smtClean="0"/>
-              <a:t>(t</a:t>
-            </a:r>
-            <a:r>
               <a:rPr lang="fr-FR" sz="1276" b="1" dirty="0"/>
-              <a:t>)</a:t>
+              <a:t>(t)</a:t>
             </a:r>
             <a:endParaRPr lang="fr-FR" sz="1276" b="1" baseline="-25000" dirty="0"/>
           </a:p>
@@ -7719,7 +9032,7 @@
           <a:lstStyle/>
           <a:p>
             <a:r>
-              <a:rPr lang="fr-FR" sz="1276" b="1" dirty="0" smtClean="0"/>
+              <a:rPr lang="fr-FR" sz="1276" b="1" dirty="0"/>
               <a:t>f</a:t>
             </a:r>
             <a:r>
@@ -7727,12 +9040,8 @@
               <a:t>4</a:t>
             </a:r>
             <a:r>
-              <a:rPr lang="fr-FR" sz="1276" b="1" dirty="0" smtClean="0"/>
-              <a:t>(t</a:t>
-            </a:r>
-            <a:r>
               <a:rPr lang="fr-FR" sz="1276" b="1" dirty="0"/>
-              <a:t>)</a:t>
+              <a:t>(t)</a:t>
             </a:r>
             <a:endParaRPr lang="fr-FR" sz="1276" b="1" baseline="-25000" dirty="0"/>
           </a:p>
@@ -9798,20 +11107,16 @@
           <a:lstStyle/>
           <a:p>
             <a:r>
-              <a:rPr lang="fr-FR" sz="1276" b="1" dirty="0" smtClean="0"/>
+              <a:rPr lang="fr-FR" sz="1276" b="1" dirty="0"/>
               <a:t>f</a:t>
             </a:r>
             <a:r>
-              <a:rPr lang="fr-FR" sz="1276" b="1" baseline="-25000" dirty="0" smtClean="0"/>
+              <a:rPr lang="fr-FR" sz="1276" b="1" baseline="-25000" dirty="0"/>
               <a:t>2</a:t>
             </a:r>
             <a:r>
-              <a:rPr lang="fr-FR" sz="1276" b="1" dirty="0" smtClean="0"/>
-              <a:t>(t</a:t>
-            </a:r>
-            <a:r>
               <a:rPr lang="fr-FR" sz="1276" b="1" dirty="0"/>
-              <a:t>)</a:t>
+              <a:t>(t)</a:t>
             </a:r>
           </a:p>
         </p:txBody>
@@ -9963,7 +11268,7 @@
           <a:lstStyle/>
           <a:p>
             <a:r>
-              <a:rPr lang="fr-FR" sz="1276" b="1" dirty="0" smtClean="0"/>
+              <a:rPr lang="fr-FR" sz="1276" b="1" dirty="0"/>
               <a:t>f</a:t>
             </a:r>
             <a:r>
@@ -9971,12 +11276,8 @@
               <a:t>3</a:t>
             </a:r>
             <a:r>
-              <a:rPr lang="fr-FR" sz="1276" b="1" dirty="0" smtClean="0"/>
-              <a:t>(t</a:t>
-            </a:r>
-            <a:r>
               <a:rPr lang="fr-FR" sz="1276" b="1" dirty="0"/>
-              <a:t>)</a:t>
+              <a:t>(t)</a:t>
             </a:r>
             <a:endParaRPr lang="fr-FR" sz="1276" b="1" baseline="-25000" dirty="0"/>
           </a:p>
@@ -10640,7 +11941,7 @@
           <a:lstStyle/>
           <a:p>
             <a:r>
-              <a:rPr lang="fr-FR" sz="1276" b="1" dirty="0" smtClean="0"/>
+              <a:rPr lang="fr-FR" sz="1276" b="1" dirty="0"/>
               <a:t>f</a:t>
             </a:r>
             <a:r>
@@ -10648,12 +11949,8 @@
               <a:t>4</a:t>
             </a:r>
             <a:r>
-              <a:rPr lang="fr-FR" sz="1276" b="1" dirty="0" smtClean="0"/>
-              <a:t>(t</a:t>
-            </a:r>
-            <a:r>
               <a:rPr lang="fr-FR" sz="1276" b="1" dirty="0"/>
-              <a:t>)</a:t>
+              <a:t>(t)</a:t>
             </a:r>
             <a:endParaRPr lang="fr-FR" sz="1276" b="1" baseline="-25000" dirty="0"/>
           </a:p>
@@ -12346,7 +13643,7 @@
 </p:sld>
 </file>
 
-<file path=ppt/slides/slide5.xml><?xml version="1.0" encoding="utf-8"?>
+<file path=ppt/slides/slide6.xml><?xml version="1.0" encoding="utf-8"?>
 <p:sld xmlns:a="http://schemas.openxmlformats.org/drawingml/2006/main" xmlns:r="http://schemas.openxmlformats.org/officeDocument/2006/relationships" xmlns:p="http://schemas.openxmlformats.org/presentationml/2006/main">
   <p:cSld>
     <p:spTree>
@@ -12819,20 +14116,16 @@
           <a:lstStyle/>
           <a:p>
             <a:r>
-              <a:rPr lang="fr-FR" sz="1276" b="1" dirty="0" smtClean="0"/>
+              <a:rPr lang="fr-FR" sz="1276" b="1" dirty="0"/>
               <a:t>f</a:t>
             </a:r>
             <a:r>
-              <a:rPr lang="fr-FR" sz="1276" b="1" baseline="-25000" dirty="0" smtClean="0"/>
+              <a:rPr lang="fr-FR" sz="1276" b="1" baseline="-25000" dirty="0"/>
               <a:t>2</a:t>
             </a:r>
             <a:r>
-              <a:rPr lang="fr-FR" sz="1276" b="1" dirty="0" smtClean="0"/>
-              <a:t>(t</a:t>
-            </a:r>
-            <a:r>
               <a:rPr lang="fr-FR" sz="1276" b="1" dirty="0"/>
-              <a:t>)</a:t>
+              <a:t>(t)</a:t>
             </a:r>
           </a:p>
         </p:txBody>
@@ -12984,7 +14277,7 @@
           <a:lstStyle/>
           <a:p>
             <a:r>
-              <a:rPr lang="fr-FR" sz="1276" b="1" dirty="0" smtClean="0"/>
+              <a:rPr lang="fr-FR" sz="1276" b="1" dirty="0"/>
               <a:t>f</a:t>
             </a:r>
             <a:r>
@@ -12992,12 +14285,8 @@
               <a:t>3</a:t>
             </a:r>
             <a:r>
-              <a:rPr lang="fr-FR" sz="1276" b="1" dirty="0" smtClean="0"/>
-              <a:t>(t</a:t>
-            </a:r>
-            <a:r>
               <a:rPr lang="fr-FR" sz="1276" b="1" dirty="0"/>
-              <a:t>)</a:t>
+              <a:t>(t)</a:t>
             </a:r>
             <a:endParaRPr lang="fr-FR" sz="1276" b="1" baseline="-25000" dirty="0"/>
           </a:p>
@@ -13661,7 +14950,7 @@
           <a:lstStyle/>
           <a:p>
             <a:r>
-              <a:rPr lang="fr-FR" sz="1276" b="1" dirty="0" smtClean="0"/>
+              <a:rPr lang="fr-FR" sz="1276" b="1" dirty="0"/>
               <a:t>f</a:t>
             </a:r>
             <a:r>
@@ -13669,12 +14958,8 @@
               <a:t>4</a:t>
             </a:r>
             <a:r>
-              <a:rPr lang="fr-FR" sz="1276" b="1" dirty="0" smtClean="0"/>
-              <a:t>(t</a:t>
-            </a:r>
-            <a:r>
               <a:rPr lang="fr-FR" sz="1276" b="1" dirty="0"/>
-              <a:t>)</a:t>
+              <a:t>(t)</a:t>
             </a:r>
             <a:endParaRPr lang="fr-FR" sz="1276" b="1" baseline="-25000" dirty="0"/>
           </a:p>
@@ -14973,20 +16258,16 @@
           <a:lstStyle/>
           <a:p>
             <a:r>
-              <a:rPr lang="fr-FR" sz="1276" b="1" dirty="0" smtClean="0"/>
+              <a:rPr lang="fr-FR" sz="1276" b="1" dirty="0"/>
               <a:t>f</a:t>
             </a:r>
             <a:r>
-              <a:rPr lang="fr-FR" sz="1276" b="1" baseline="-25000" dirty="0" smtClean="0"/>
+              <a:rPr lang="fr-FR" sz="1276" b="1" baseline="-25000" dirty="0"/>
               <a:t>2</a:t>
             </a:r>
             <a:r>
-              <a:rPr lang="fr-FR" sz="1276" b="1" dirty="0" smtClean="0"/>
-              <a:t>(t</a:t>
-            </a:r>
-            <a:r>
               <a:rPr lang="fr-FR" sz="1276" b="1" dirty="0"/>
-              <a:t>)</a:t>
+              <a:t>(t)</a:t>
             </a:r>
           </a:p>
         </p:txBody>
@@ -15138,7 +16419,7 @@
           <a:lstStyle/>
           <a:p>
             <a:r>
-              <a:rPr lang="fr-FR" sz="1276" b="1" dirty="0" smtClean="0"/>
+              <a:rPr lang="fr-FR" sz="1276" b="1" dirty="0"/>
               <a:t>f</a:t>
             </a:r>
             <a:r>
@@ -15146,12 +16427,8 @@
               <a:t>3</a:t>
             </a:r>
             <a:r>
-              <a:rPr lang="fr-FR" sz="1276" b="1" dirty="0" smtClean="0"/>
-              <a:t>(t</a:t>
-            </a:r>
-            <a:r>
               <a:rPr lang="fr-FR" sz="1276" b="1" dirty="0"/>
-              <a:t>)</a:t>
+              <a:t>(t)</a:t>
             </a:r>
             <a:endParaRPr lang="fr-FR" sz="1276" b="1" baseline="-25000" dirty="0"/>
           </a:p>
@@ -15815,7 +17092,7 @@
           <a:lstStyle/>
           <a:p>
             <a:r>
-              <a:rPr lang="fr-FR" sz="1276" b="1" dirty="0" smtClean="0"/>
+              <a:rPr lang="fr-FR" sz="1276" b="1" dirty="0"/>
               <a:t>f</a:t>
             </a:r>
             <a:r>
@@ -15823,12 +17100,8 @@
               <a:t>4</a:t>
             </a:r>
             <a:r>
-              <a:rPr lang="fr-FR" sz="1276" b="1" dirty="0" smtClean="0"/>
-              <a:t>(t</a:t>
-            </a:r>
-            <a:r>
               <a:rPr lang="fr-FR" sz="1276" b="1" dirty="0"/>
-              <a:t>)</a:t>
+              <a:t>(t)</a:t>
             </a:r>
             <a:endParaRPr lang="fr-FR" sz="1276" b="1" baseline="-25000" dirty="0"/>
           </a:p>
@@ -18224,7 +19497,7 @@
 </p:sld>
 </file>
 
-<file path=ppt/slides/slide6.xml><?xml version="1.0" encoding="utf-8"?>
+<file path=ppt/slides/slide7.xml><?xml version="1.0" encoding="utf-8"?>
 <p:sld xmlns:a="http://schemas.openxmlformats.org/drawingml/2006/main" xmlns:r="http://schemas.openxmlformats.org/officeDocument/2006/relationships" xmlns:p="http://schemas.openxmlformats.org/presentationml/2006/main">
   <p:cSld>
     <p:spTree>
@@ -18416,7 +19689,7 @@
           <a:lstStyle/>
           <a:p>
             <a:r>
-              <a:rPr lang="fr-FR" sz="1400" b="1" dirty="0" err="1" smtClean="0">
+              <a:rPr lang="fr-FR" sz="1400" b="1" dirty="0" err="1">
                 <a:solidFill>
                   <a:srgbClr val="FF0000"/>
                 </a:solidFill>
@@ -18424,7 +19697,7 @@
               <a:t>unused</a:t>
             </a:r>
             <a:r>
-              <a:rPr lang="fr-FR" sz="1400" b="1" dirty="0" smtClean="0">
+              <a:rPr lang="fr-FR" sz="1400" b="1" dirty="0">
                 <a:solidFill>
                   <a:srgbClr val="FF0000"/>
                 </a:solidFill>
@@ -18434,7 +19707,7 @@
           </a:p>
           <a:p>
             <a:r>
-              <a:rPr lang="fr-FR" sz="1400" b="1" dirty="0" err="1" smtClean="0">
+              <a:rPr lang="fr-FR" sz="1400" b="1" dirty="0" err="1">
                 <a:solidFill>
                   <a:srgbClr val="FF0000"/>
                 </a:solidFill>
@@ -18442,7 +19715,7 @@
               <a:t>this</a:t>
             </a:r>
             <a:r>
-              <a:rPr lang="fr-FR" sz="1400" b="1" dirty="0" smtClean="0">
+              <a:rPr lang="fr-FR" sz="1400" b="1" dirty="0">
                 <a:solidFill>
                   <a:srgbClr val="FF0000"/>
                 </a:solidFill>
@@ -18450,7 +19723,7 @@
               <a:t> </a:t>
             </a:r>
             <a:r>
-              <a:rPr lang="fr-FR" sz="1400" b="1" dirty="0" err="1" smtClean="0">
+              <a:rPr lang="fr-FR" sz="1400" b="1" dirty="0" err="1">
                 <a:solidFill>
                   <a:srgbClr val="FF0000"/>
                 </a:solidFill>
@@ -18478,7 +19751,7 @@
 </p:sld>
 </file>
 
-<file path=ppt/slides/slide7.xml><?xml version="1.0" encoding="utf-8"?>
+<file path=ppt/slides/slide8.xml><?xml version="1.0" encoding="utf-8"?>
 <p:sld xmlns:a="http://schemas.openxmlformats.org/drawingml/2006/main" xmlns:r="http://schemas.openxmlformats.org/officeDocument/2006/relationships" xmlns:p="http://schemas.openxmlformats.org/presentationml/2006/main">
   <p:cSld>
     <p:spTree>
@@ -18511,11 +19784,11 @@
           <a:lstStyle/>
           <a:p>
             <a:r>
-              <a:rPr lang="fr-FR" b="1" dirty="0" smtClean="0"/>
+              <a:rPr lang="fr-FR" b="1" dirty="0"/>
               <a:t>TP </a:t>
             </a:r>
             <a:r>
-              <a:rPr lang="fr-FR" b="1" dirty="0" err="1" smtClean="0"/>
+              <a:rPr lang="fr-FR" b="1" dirty="0" err="1"/>
               <a:t>Flyback</a:t>
             </a:r>
             <a:endParaRPr lang="fr-FR" b="1" dirty="0"/>
@@ -18535,7 +19808,7 @@
 </p:sld>
 </file>
 
-<file path=ppt/slides/slide8.xml><?xml version="1.0" encoding="utf-8"?>
+<file path=ppt/slides/slide9.xml><?xml version="1.0" encoding="utf-8"?>
 <p:sld xmlns:a="http://schemas.openxmlformats.org/drawingml/2006/main" xmlns:r="http://schemas.openxmlformats.org/officeDocument/2006/relationships" xmlns:p="http://schemas.openxmlformats.org/presentationml/2006/main">
   <p:cSld>
     <p:spTree>
@@ -19004,7 +20277,7 @@
           <a:lstStyle/>
           <a:p>
             <a:r>
-              <a:rPr lang="el-GR" sz="1276" b="1" dirty="0" smtClean="0"/>
+              <a:rPr lang="el-GR" sz="1276" b="1" dirty="0"/>
               <a:t>ϕ</a:t>
             </a:r>
             <a:endParaRPr lang="fr-FR" sz="1276" b="1" dirty="0"/>
@@ -19158,14 +20431,13 @@
           <a:lstStyle/>
           <a:p>
             <a:r>
-              <a:rPr lang="fr-FR" sz="1276" b="1" dirty="0" smtClean="0"/>
+              <a:rPr lang="fr-FR" sz="1276" b="1" dirty="0"/>
               <a:t>i</a:t>
             </a:r>
             <a:r>
-              <a:rPr lang="fr-FR" sz="1276" b="1" baseline="-25000" dirty="0" smtClean="0"/>
+              <a:rPr lang="fr-FR" sz="1276" b="1" baseline="-25000" dirty="0"/>
               <a:t>1</a:t>
             </a:r>
-            <a:endParaRPr lang="fr-FR" sz="1276" b="1" baseline="-25000" dirty="0"/>
           </a:p>
         </p:txBody>
       </p:sp>
@@ -19440,14 +20712,13 @@
           <a:lstStyle/>
           <a:p>
             <a:r>
-              <a:rPr lang="fr-FR" sz="1276" b="1" dirty="0" smtClean="0"/>
+              <a:rPr lang="fr-FR" sz="1276" b="1" dirty="0"/>
               <a:t>v</a:t>
             </a:r>
             <a:r>
-              <a:rPr lang="fr-FR" sz="1276" b="1" baseline="-25000" dirty="0" smtClean="0"/>
+              <a:rPr lang="fr-FR" sz="1276" b="1" baseline="-25000" dirty="0"/>
               <a:t>2</a:t>
             </a:r>
-            <a:endParaRPr lang="fr-FR" sz="1276" b="1" baseline="-25000" dirty="0"/>
           </a:p>
         </p:txBody>
       </p:sp>
@@ -19827,7 +21098,7 @@
           <a:lstStyle/>
           <a:p>
             <a:r>
-              <a:rPr lang="fr-FR" sz="1276" b="1" smtClean="0"/>
+              <a:rPr lang="fr-FR" sz="1276" b="1"/>
               <a:t>i</a:t>
             </a:r>
             <a:r>
@@ -20329,914 +21600,6 @@
     <p:extLst>
       <p:ext uri="{BB962C8B-B14F-4D97-AF65-F5344CB8AC3E}">
         <p14:creationId xmlns:p14="http://schemas.microsoft.com/office/powerpoint/2010/main" val="2044163002"/>
-      </p:ext>
-    </p:extLst>
-  </p:cSld>
-  <p:clrMapOvr>
-    <a:masterClrMapping/>
-  </p:clrMapOvr>
-</p:sld>
-</file>
-
-<file path=ppt/slides/slide9.xml><?xml version="1.0" encoding="utf-8"?>
-<p:sld xmlns:a="http://schemas.openxmlformats.org/drawingml/2006/main" xmlns:r="http://schemas.openxmlformats.org/officeDocument/2006/relationships" xmlns:p="http://schemas.openxmlformats.org/presentationml/2006/main">
-  <p:cSld>
-    <p:spTree>
-      <p:nvGrpSpPr>
-        <p:cNvPr id="1" name=""/>
-        <p:cNvGrpSpPr/>
-        <p:nvPr/>
-      </p:nvGrpSpPr>
-      <p:grpSpPr>
-        <a:xfrm>
-          <a:off x="0" y="0"/>
-          <a:ext cx="0" cy="0"/>
-          <a:chOff x="0" y="0"/>
-          <a:chExt cx="0" cy="0"/>
-        </a:xfrm>
-      </p:grpSpPr>
-      <p:pic>
-        <p:nvPicPr>
-          <p:cNvPr id="4" name="Image 3"/>
-          <p:cNvPicPr>
-            <a:picLocks noChangeAspect="1"/>
-          </p:cNvPicPr>
-          <p:nvPr/>
-        </p:nvPicPr>
-        <p:blipFill>
-          <a:blip r:embed="rId2"/>
-          <a:stretch>
-            <a:fillRect/>
-          </a:stretch>
-        </p:blipFill>
-        <p:spPr>
-          <a:xfrm>
-            <a:off x="551676" y="771154"/>
-            <a:ext cx="11088647" cy="5315692"/>
-          </a:xfrm>
-          <a:prstGeom prst="rect">
-            <a:avLst/>
-          </a:prstGeom>
-        </p:spPr>
-      </p:pic>
-      <p:cxnSp>
-        <p:nvCxnSpPr>
-          <p:cNvPr id="6" name="Connecteur droit avec flèche 5"/>
-          <p:cNvCxnSpPr/>
-          <p:nvPr/>
-        </p:nvCxnSpPr>
-        <p:spPr>
-          <a:xfrm>
-            <a:off x="6311900" y="1949450"/>
-            <a:ext cx="104775" cy="0"/>
-          </a:xfrm>
-          <a:prstGeom prst="straightConnector1">
-            <a:avLst/>
-          </a:prstGeom>
-          <a:ln w="57150">
-            <a:solidFill>
-              <a:schemeClr val="tx1"/>
-            </a:solidFill>
-            <a:tailEnd type="triangle"/>
-          </a:ln>
-        </p:spPr>
-        <p:style>
-          <a:lnRef idx="1">
-            <a:schemeClr val="accent1"/>
-          </a:lnRef>
-          <a:fillRef idx="0">
-            <a:schemeClr val="accent1"/>
-          </a:fillRef>
-          <a:effectRef idx="0">
-            <a:schemeClr val="accent1"/>
-          </a:effectRef>
-          <a:fontRef idx="minor">
-            <a:schemeClr val="tx1"/>
-          </a:fontRef>
-        </p:style>
-      </p:cxnSp>
-      <p:sp>
-        <p:nvSpPr>
-          <p:cNvPr id="10" name="ZoneTexte 9"/>
-          <p:cNvSpPr txBox="1"/>
-          <p:nvPr/>
-        </p:nvSpPr>
-        <p:spPr>
-          <a:xfrm>
-            <a:off x="6182186" y="1487785"/>
-            <a:ext cx="330540" cy="400110"/>
-          </a:xfrm>
-          <a:prstGeom prst="rect">
-            <a:avLst/>
-          </a:prstGeom>
-          <a:noFill/>
-        </p:spPr>
-        <p:txBody>
-          <a:bodyPr wrap="none" rtlCol="0">
-            <a:spAutoFit/>
-          </a:bodyPr>
-          <a:lstStyle/>
-          <a:p>
-            <a:r>
-              <a:rPr lang="fr-FR" sz="2000" b="1" dirty="0" smtClean="0"/>
-              <a:t>i</a:t>
-            </a:r>
-            <a:r>
-              <a:rPr lang="fr-FR" sz="2000" b="1" baseline="-25000" dirty="0" smtClean="0"/>
-              <a:t>2</a:t>
-            </a:r>
-            <a:endParaRPr lang="fr-FR" sz="2000" b="1" baseline="-25000" dirty="0"/>
-          </a:p>
-        </p:txBody>
-      </p:sp>
-      <p:sp>
-        <p:nvSpPr>
-          <p:cNvPr id="11" name="Ellipse 10"/>
-          <p:cNvSpPr/>
-          <p:nvPr/>
-        </p:nvSpPr>
-        <p:spPr>
-          <a:xfrm>
-            <a:off x="6095999" y="4104409"/>
-            <a:ext cx="215901" cy="207818"/>
-          </a:xfrm>
-          <a:prstGeom prst="ellipse">
-            <a:avLst/>
-          </a:prstGeom>
-          <a:solidFill>
-            <a:schemeClr val="tx1"/>
-          </a:solidFill>
-          <a:ln>
-            <a:noFill/>
-          </a:ln>
-        </p:spPr>
-        <p:style>
-          <a:lnRef idx="2">
-            <a:schemeClr val="accent1">
-              <a:shade val="50000"/>
-            </a:schemeClr>
-          </a:lnRef>
-          <a:fillRef idx="1">
-            <a:schemeClr val="accent1"/>
-          </a:fillRef>
-          <a:effectRef idx="0">
-            <a:schemeClr val="accent1"/>
-          </a:effectRef>
-          <a:fontRef idx="minor">
-            <a:schemeClr val="lt1"/>
-          </a:fontRef>
-        </p:style>
-        <p:txBody>
-          <a:bodyPr rtlCol="0" anchor="ctr"/>
-          <a:lstStyle/>
-          <a:p>
-            <a:pPr algn="ctr"/>
-            <a:endParaRPr lang="fr-FR"/>
-          </a:p>
-        </p:txBody>
-      </p:sp>
-      <p:sp>
-        <p:nvSpPr>
-          <p:cNvPr id="12" name="Ellipse 11"/>
-          <p:cNvSpPr/>
-          <p:nvPr/>
-        </p:nvSpPr>
-        <p:spPr>
-          <a:xfrm>
-            <a:off x="3721099" y="4637809"/>
-            <a:ext cx="215901" cy="207818"/>
-          </a:xfrm>
-          <a:prstGeom prst="ellipse">
-            <a:avLst/>
-          </a:prstGeom>
-          <a:solidFill>
-            <a:schemeClr val="tx1"/>
-          </a:solidFill>
-          <a:ln>
-            <a:noFill/>
-          </a:ln>
-        </p:spPr>
-        <p:style>
-          <a:lnRef idx="2">
-            <a:schemeClr val="accent1">
-              <a:shade val="50000"/>
-            </a:schemeClr>
-          </a:lnRef>
-          <a:fillRef idx="1">
-            <a:schemeClr val="accent1"/>
-          </a:fillRef>
-          <a:effectRef idx="0">
-            <a:schemeClr val="accent1"/>
-          </a:effectRef>
-          <a:fontRef idx="minor">
-            <a:schemeClr val="lt1"/>
-          </a:fontRef>
-        </p:style>
-        <p:txBody>
-          <a:bodyPr rtlCol="0" anchor="ctr"/>
-          <a:lstStyle/>
-          <a:p>
-            <a:pPr algn="ctr"/>
-            <a:endParaRPr lang="fr-FR"/>
-          </a:p>
-        </p:txBody>
-      </p:sp>
-      <p:sp>
-        <p:nvSpPr>
-          <p:cNvPr id="13" name="Ellipse 12"/>
-          <p:cNvSpPr/>
-          <p:nvPr/>
-        </p:nvSpPr>
-        <p:spPr>
-          <a:xfrm>
-            <a:off x="4267199" y="4000500"/>
-            <a:ext cx="215901" cy="207818"/>
-          </a:xfrm>
-          <a:prstGeom prst="ellipse">
-            <a:avLst/>
-          </a:prstGeom>
-          <a:solidFill>
-            <a:schemeClr val="tx1"/>
-          </a:solidFill>
-          <a:ln>
-            <a:noFill/>
-          </a:ln>
-        </p:spPr>
-        <p:style>
-          <a:lnRef idx="2">
-            <a:schemeClr val="accent1">
-              <a:shade val="50000"/>
-            </a:schemeClr>
-          </a:lnRef>
-          <a:fillRef idx="1">
-            <a:schemeClr val="accent1"/>
-          </a:fillRef>
-          <a:effectRef idx="0">
-            <a:schemeClr val="accent1"/>
-          </a:effectRef>
-          <a:fontRef idx="minor">
-            <a:schemeClr val="lt1"/>
-          </a:fontRef>
-        </p:style>
-        <p:txBody>
-          <a:bodyPr rtlCol="0" anchor="ctr"/>
-          <a:lstStyle/>
-          <a:p>
-            <a:pPr algn="ctr"/>
-            <a:endParaRPr lang="fr-FR"/>
-          </a:p>
-        </p:txBody>
-      </p:sp>
-      <p:sp>
-        <p:nvSpPr>
-          <p:cNvPr id="14" name="Ellipse 13"/>
-          <p:cNvSpPr/>
-          <p:nvPr/>
-        </p:nvSpPr>
-        <p:spPr>
-          <a:xfrm>
-            <a:off x="4267199" y="1914154"/>
-            <a:ext cx="215901" cy="207818"/>
-          </a:xfrm>
-          <a:prstGeom prst="ellipse">
-            <a:avLst/>
-          </a:prstGeom>
-          <a:solidFill>
-            <a:schemeClr val="tx1"/>
-          </a:solidFill>
-          <a:ln>
-            <a:noFill/>
-          </a:ln>
-        </p:spPr>
-        <p:style>
-          <a:lnRef idx="2">
-            <a:schemeClr val="accent1">
-              <a:shade val="50000"/>
-            </a:schemeClr>
-          </a:lnRef>
-          <a:fillRef idx="1">
-            <a:schemeClr val="accent1"/>
-          </a:fillRef>
-          <a:effectRef idx="0">
-            <a:schemeClr val="accent1"/>
-          </a:effectRef>
-          <a:fontRef idx="minor">
-            <a:schemeClr val="lt1"/>
-          </a:fontRef>
-        </p:style>
-        <p:txBody>
-          <a:bodyPr rtlCol="0" anchor="ctr"/>
-          <a:lstStyle/>
-          <a:p>
-            <a:pPr algn="ctr"/>
-            <a:endParaRPr lang="fr-FR"/>
-          </a:p>
-        </p:txBody>
-      </p:sp>
-      <p:sp>
-        <p:nvSpPr>
-          <p:cNvPr id="15" name="Ellipse 14"/>
-          <p:cNvSpPr/>
-          <p:nvPr/>
-        </p:nvSpPr>
-        <p:spPr>
-          <a:xfrm>
-            <a:off x="6720503" y="1844881"/>
-            <a:ext cx="215901" cy="207818"/>
-          </a:xfrm>
-          <a:prstGeom prst="ellipse">
-            <a:avLst/>
-          </a:prstGeom>
-          <a:solidFill>
-            <a:schemeClr val="tx1"/>
-          </a:solidFill>
-          <a:ln>
-            <a:noFill/>
-          </a:ln>
-        </p:spPr>
-        <p:style>
-          <a:lnRef idx="2">
-            <a:schemeClr val="accent1">
-              <a:shade val="50000"/>
-            </a:schemeClr>
-          </a:lnRef>
-          <a:fillRef idx="1">
-            <a:schemeClr val="accent1"/>
-          </a:fillRef>
-          <a:effectRef idx="0">
-            <a:schemeClr val="accent1"/>
-          </a:effectRef>
-          <a:fontRef idx="minor">
-            <a:schemeClr val="lt1"/>
-          </a:fontRef>
-        </p:style>
-        <p:txBody>
-          <a:bodyPr rtlCol="0" anchor="ctr"/>
-          <a:lstStyle/>
-          <a:p>
-            <a:pPr algn="ctr"/>
-            <a:endParaRPr lang="fr-FR"/>
-          </a:p>
-        </p:txBody>
-      </p:sp>
-      <p:sp>
-        <p:nvSpPr>
-          <p:cNvPr id="17" name="Rectangle 16"/>
-          <p:cNvSpPr/>
-          <p:nvPr/>
-        </p:nvSpPr>
-        <p:spPr>
-          <a:xfrm>
-            <a:off x="10414000" y="5130800"/>
-            <a:ext cx="990600" cy="457200"/>
-          </a:xfrm>
-          <a:prstGeom prst="rect">
-            <a:avLst/>
-          </a:prstGeom>
-          <a:solidFill>
-            <a:schemeClr val="bg1"/>
-          </a:solidFill>
-          <a:ln>
-            <a:noFill/>
-          </a:ln>
-        </p:spPr>
-        <p:style>
-          <a:lnRef idx="2">
-            <a:schemeClr val="accent1">
-              <a:shade val="50000"/>
-            </a:schemeClr>
-          </a:lnRef>
-          <a:fillRef idx="1">
-            <a:schemeClr val="accent1"/>
-          </a:fillRef>
-          <a:effectRef idx="0">
-            <a:schemeClr val="accent1"/>
-          </a:effectRef>
-          <a:fontRef idx="minor">
-            <a:schemeClr val="lt1"/>
-          </a:fontRef>
-        </p:style>
-        <p:txBody>
-          <a:bodyPr rtlCol="0" anchor="ctr"/>
-          <a:lstStyle/>
-          <a:p>
-            <a:pPr algn="ctr"/>
-            <a:endParaRPr lang="fr-FR"/>
-          </a:p>
-        </p:txBody>
-      </p:sp>
-      <p:sp>
-        <p:nvSpPr>
-          <p:cNvPr id="18" name="Ellipse 17"/>
-          <p:cNvSpPr/>
-          <p:nvPr/>
-        </p:nvSpPr>
-        <p:spPr>
-          <a:xfrm>
-            <a:off x="4261427" y="5605317"/>
-            <a:ext cx="215901" cy="207818"/>
-          </a:xfrm>
-          <a:prstGeom prst="ellipse">
-            <a:avLst/>
-          </a:prstGeom>
-          <a:solidFill>
-            <a:schemeClr val="tx1"/>
-          </a:solidFill>
-          <a:ln>
-            <a:noFill/>
-          </a:ln>
-        </p:spPr>
-        <p:style>
-          <a:lnRef idx="2">
-            <a:schemeClr val="accent1">
-              <a:shade val="50000"/>
-            </a:schemeClr>
-          </a:lnRef>
-          <a:fillRef idx="1">
-            <a:schemeClr val="accent1"/>
-          </a:fillRef>
-          <a:effectRef idx="0">
-            <a:schemeClr val="accent1"/>
-          </a:effectRef>
-          <a:fontRef idx="minor">
-            <a:schemeClr val="lt1"/>
-          </a:fontRef>
-        </p:style>
-        <p:txBody>
-          <a:bodyPr rtlCol="0" anchor="ctr"/>
-          <a:lstStyle/>
-          <a:p>
-            <a:pPr algn="ctr"/>
-            <a:endParaRPr lang="fr-FR"/>
-          </a:p>
-        </p:txBody>
-      </p:sp>
-      <p:sp>
-        <p:nvSpPr>
-          <p:cNvPr id="19" name="Rectangle 18"/>
-          <p:cNvSpPr/>
-          <p:nvPr/>
-        </p:nvSpPr>
-        <p:spPr>
-          <a:xfrm>
-            <a:off x="2322946" y="2168154"/>
-            <a:ext cx="392545" cy="951346"/>
-          </a:xfrm>
-          <a:prstGeom prst="rect">
-            <a:avLst/>
-          </a:prstGeom>
-          <a:solidFill>
-            <a:schemeClr val="bg1"/>
-          </a:solidFill>
-          <a:ln>
-            <a:noFill/>
-          </a:ln>
-        </p:spPr>
-        <p:style>
-          <a:lnRef idx="2">
-            <a:schemeClr val="accent1">
-              <a:shade val="50000"/>
-            </a:schemeClr>
-          </a:lnRef>
-          <a:fillRef idx="1">
-            <a:schemeClr val="accent1"/>
-          </a:fillRef>
-          <a:effectRef idx="0">
-            <a:schemeClr val="accent1"/>
-          </a:effectRef>
-          <a:fontRef idx="minor">
-            <a:schemeClr val="lt1"/>
-          </a:fontRef>
-        </p:style>
-        <p:txBody>
-          <a:bodyPr rtlCol="0" anchor="ctr"/>
-          <a:lstStyle/>
-          <a:p>
-            <a:pPr algn="ctr"/>
-            <a:endParaRPr lang="fr-FR"/>
-          </a:p>
-        </p:txBody>
-      </p:sp>
-      <p:sp>
-        <p:nvSpPr>
-          <p:cNvPr id="3" name="ZoneTexte 2"/>
-          <p:cNvSpPr txBox="1"/>
-          <p:nvPr/>
-        </p:nvSpPr>
-        <p:spPr>
-          <a:xfrm>
-            <a:off x="2950443" y="2044535"/>
-            <a:ext cx="700833" cy="400110"/>
-          </a:xfrm>
-          <a:prstGeom prst="rect">
-            <a:avLst/>
-          </a:prstGeom>
-          <a:noFill/>
-        </p:spPr>
-        <p:txBody>
-          <a:bodyPr wrap="none" rtlCol="0">
-            <a:spAutoFit/>
-          </a:bodyPr>
-          <a:lstStyle/>
-          <a:p>
-            <a:r>
-              <a:rPr lang="fr-FR" sz="2000" b="1" dirty="0"/>
-              <a:t>n</a:t>
-            </a:r>
-            <a:r>
-              <a:rPr lang="el-GR" sz="2000" b="1" baseline="-25000" dirty="0" smtClean="0"/>
-              <a:t>φ</a:t>
-            </a:r>
-            <a:r>
-              <a:rPr lang="fr-FR" sz="2000" b="1" dirty="0" smtClean="0"/>
-              <a:t>=1</a:t>
-            </a:r>
-            <a:endParaRPr lang="fr-FR" sz="2000" b="1" dirty="0"/>
-          </a:p>
-        </p:txBody>
-      </p:sp>
-      <p:cxnSp>
-        <p:nvCxnSpPr>
-          <p:cNvPr id="7" name="Connecteur droit avec flèche 6"/>
-          <p:cNvCxnSpPr/>
-          <p:nvPr/>
-        </p:nvCxnSpPr>
-        <p:spPr>
-          <a:xfrm flipV="1">
-            <a:off x="2715491" y="2168154"/>
-            <a:ext cx="0" cy="1517155"/>
-          </a:xfrm>
-          <a:prstGeom prst="straightConnector1">
-            <a:avLst/>
-          </a:prstGeom>
-          <a:ln w="28575">
-            <a:solidFill>
-              <a:schemeClr val="tx1"/>
-            </a:solidFill>
-            <a:headEnd type="none" w="med" len="med"/>
-            <a:tailEnd type="arrow" w="med" len="med"/>
-          </a:ln>
-        </p:spPr>
-        <p:style>
-          <a:lnRef idx="1">
-            <a:schemeClr val="accent1"/>
-          </a:lnRef>
-          <a:fillRef idx="0">
-            <a:schemeClr val="accent1"/>
-          </a:fillRef>
-          <a:effectRef idx="0">
-            <a:schemeClr val="accent1"/>
-          </a:effectRef>
-          <a:fontRef idx="minor">
-            <a:schemeClr val="tx1"/>
-          </a:fontRef>
-        </p:style>
-      </p:cxnSp>
-      <p:sp>
-        <p:nvSpPr>
-          <p:cNvPr id="8" name="ZoneTexte 7"/>
-          <p:cNvSpPr txBox="1"/>
-          <p:nvPr/>
-        </p:nvSpPr>
-        <p:spPr>
-          <a:xfrm>
-            <a:off x="2127607" y="2274495"/>
-            <a:ext cx="653256" cy="400110"/>
-          </a:xfrm>
-          <a:prstGeom prst="rect">
-            <a:avLst/>
-          </a:prstGeom>
-          <a:noFill/>
-        </p:spPr>
-        <p:txBody>
-          <a:bodyPr wrap="none" rtlCol="0">
-            <a:spAutoFit/>
-          </a:bodyPr>
-          <a:lstStyle/>
-          <a:p>
-            <a:r>
-              <a:rPr lang="fr-FR" sz="2000" b="1" dirty="0" smtClean="0"/>
-              <a:t>v</a:t>
-            </a:r>
-            <a:r>
-              <a:rPr lang="fr-FR" sz="2000" b="1" baseline="-25000" dirty="0" smtClean="0"/>
-              <a:t>spire</a:t>
-            </a:r>
-            <a:endParaRPr lang="fr-FR" sz="2000" b="1" baseline="-25000" dirty="0"/>
-          </a:p>
-        </p:txBody>
-      </p:sp>
-      <p:sp>
-        <p:nvSpPr>
-          <p:cNvPr id="20" name="Rectangle 19"/>
-          <p:cNvSpPr/>
-          <p:nvPr/>
-        </p:nvSpPr>
-        <p:spPr>
-          <a:xfrm>
-            <a:off x="1761754" y="2672657"/>
-            <a:ext cx="392545" cy="338200"/>
-          </a:xfrm>
-          <a:prstGeom prst="rect">
-            <a:avLst/>
-          </a:prstGeom>
-          <a:solidFill>
-            <a:schemeClr val="bg1"/>
-          </a:solidFill>
-          <a:ln>
-            <a:noFill/>
-          </a:ln>
-        </p:spPr>
-        <p:style>
-          <a:lnRef idx="2">
-            <a:schemeClr val="accent1">
-              <a:shade val="50000"/>
-            </a:schemeClr>
-          </a:lnRef>
-          <a:fillRef idx="1">
-            <a:schemeClr val="accent1"/>
-          </a:fillRef>
-          <a:effectRef idx="0">
-            <a:schemeClr val="accent1"/>
-          </a:effectRef>
-          <a:fontRef idx="minor">
-            <a:schemeClr val="lt1"/>
-          </a:fontRef>
-        </p:style>
-        <p:txBody>
-          <a:bodyPr rtlCol="0" anchor="ctr"/>
-          <a:lstStyle/>
-          <a:p>
-            <a:pPr algn="ctr"/>
-            <a:endParaRPr lang="fr-FR"/>
-          </a:p>
-        </p:txBody>
-      </p:sp>
-      <p:sp>
-        <p:nvSpPr>
-          <p:cNvPr id="9" name="Rectangle 8"/>
-          <p:cNvSpPr/>
-          <p:nvPr/>
-        </p:nvSpPr>
-        <p:spPr>
-          <a:xfrm>
-            <a:off x="1907448" y="3620777"/>
-            <a:ext cx="574324" cy="400110"/>
-          </a:xfrm>
-          <a:prstGeom prst="rect">
-            <a:avLst/>
-          </a:prstGeom>
-        </p:spPr>
-        <p:txBody>
-          <a:bodyPr wrap="none">
-            <a:spAutoFit/>
-          </a:bodyPr>
-          <a:lstStyle/>
-          <a:p>
-            <a:r>
-              <a:rPr lang="fr-FR" sz="2000" b="1" dirty="0" smtClean="0"/>
-              <a:t>v</a:t>
-            </a:r>
-            <a:r>
-              <a:rPr lang="fr-FR" sz="2000" b="1" baseline="-25000" dirty="0" smtClean="0"/>
-              <a:t>flux</a:t>
-            </a:r>
-            <a:endParaRPr lang="fr-FR" sz="2000" dirty="0"/>
-          </a:p>
-        </p:txBody>
-      </p:sp>
-      <p:sp>
-        <p:nvSpPr>
-          <p:cNvPr id="21" name="Rectangle 20"/>
-          <p:cNvSpPr/>
-          <p:nvPr/>
-        </p:nvSpPr>
-        <p:spPr>
-          <a:xfrm>
-            <a:off x="3455003" y="1610590"/>
-            <a:ext cx="392545" cy="338200"/>
-          </a:xfrm>
-          <a:prstGeom prst="rect">
-            <a:avLst/>
-          </a:prstGeom>
-          <a:solidFill>
-            <a:schemeClr val="bg1"/>
-          </a:solidFill>
-          <a:ln>
-            <a:noFill/>
-          </a:ln>
-        </p:spPr>
-        <p:style>
-          <a:lnRef idx="2">
-            <a:schemeClr val="accent1">
-              <a:shade val="50000"/>
-            </a:schemeClr>
-          </a:lnRef>
-          <a:fillRef idx="1">
-            <a:schemeClr val="accent1"/>
-          </a:fillRef>
-          <a:effectRef idx="0">
-            <a:schemeClr val="accent1"/>
-          </a:effectRef>
-          <a:fontRef idx="minor">
-            <a:schemeClr val="lt1"/>
-          </a:fontRef>
-        </p:style>
-        <p:txBody>
-          <a:bodyPr rtlCol="0" anchor="ctr"/>
-          <a:lstStyle/>
-          <a:p>
-            <a:pPr algn="ctr"/>
-            <a:endParaRPr lang="fr-FR"/>
-          </a:p>
-        </p:txBody>
-      </p:sp>
-      <p:sp>
-        <p:nvSpPr>
-          <p:cNvPr id="22" name="Rectangle 21"/>
-          <p:cNvSpPr/>
-          <p:nvPr/>
-        </p:nvSpPr>
-        <p:spPr>
-          <a:xfrm>
-            <a:off x="3721099" y="2742065"/>
-            <a:ext cx="393056" cy="400110"/>
-          </a:xfrm>
-          <a:prstGeom prst="rect">
-            <a:avLst/>
-          </a:prstGeom>
-        </p:spPr>
-        <p:txBody>
-          <a:bodyPr wrap="none">
-            <a:spAutoFit/>
-          </a:bodyPr>
-          <a:lstStyle/>
-          <a:p>
-            <a:r>
-              <a:rPr lang="fr-FR" sz="2000" b="1" dirty="0" smtClean="0"/>
-              <a:t>v</a:t>
-            </a:r>
-            <a:r>
-              <a:rPr lang="fr-FR" sz="2000" b="1" baseline="-25000" dirty="0" smtClean="0"/>
-              <a:t>1</a:t>
-            </a:r>
-            <a:endParaRPr lang="fr-FR" sz="2000" baseline="-25000" dirty="0"/>
-          </a:p>
-        </p:txBody>
-      </p:sp>
-      <p:sp>
-        <p:nvSpPr>
-          <p:cNvPr id="23" name="Rectangle 22"/>
-          <p:cNvSpPr/>
-          <p:nvPr/>
-        </p:nvSpPr>
-        <p:spPr>
-          <a:xfrm>
-            <a:off x="5750385" y="2726676"/>
-            <a:ext cx="393056" cy="400110"/>
-          </a:xfrm>
-          <a:prstGeom prst="rect">
-            <a:avLst/>
-          </a:prstGeom>
-        </p:spPr>
-        <p:txBody>
-          <a:bodyPr wrap="none">
-            <a:spAutoFit/>
-          </a:bodyPr>
-          <a:lstStyle/>
-          <a:p>
-            <a:r>
-              <a:rPr lang="fr-FR" sz="2000" b="1" dirty="0" smtClean="0"/>
-              <a:t>v</a:t>
-            </a:r>
-            <a:r>
-              <a:rPr lang="fr-FR" sz="2000" b="1" baseline="-25000" dirty="0" smtClean="0"/>
-              <a:t>2</a:t>
-            </a:r>
-            <a:endParaRPr lang="fr-FR" sz="2000" baseline="-25000" dirty="0"/>
-          </a:p>
-        </p:txBody>
-      </p:sp>
-      <p:sp>
-        <p:nvSpPr>
-          <p:cNvPr id="24" name="Rectangle 23"/>
-          <p:cNvSpPr/>
-          <p:nvPr/>
-        </p:nvSpPr>
-        <p:spPr>
-          <a:xfrm>
-            <a:off x="5543024" y="1594344"/>
-            <a:ext cx="392545" cy="338200"/>
-          </a:xfrm>
-          <a:prstGeom prst="rect">
-            <a:avLst/>
-          </a:prstGeom>
-          <a:solidFill>
-            <a:schemeClr val="bg1"/>
-          </a:solidFill>
-          <a:ln>
-            <a:noFill/>
-          </a:ln>
-        </p:spPr>
-        <p:style>
-          <a:lnRef idx="2">
-            <a:schemeClr val="accent1">
-              <a:shade val="50000"/>
-            </a:schemeClr>
-          </a:lnRef>
-          <a:fillRef idx="1">
-            <a:schemeClr val="accent1"/>
-          </a:fillRef>
-          <a:effectRef idx="0">
-            <a:schemeClr val="accent1"/>
-          </a:effectRef>
-          <a:fontRef idx="minor">
-            <a:schemeClr val="lt1"/>
-          </a:fontRef>
-        </p:style>
-        <p:txBody>
-          <a:bodyPr rtlCol="0" anchor="ctr"/>
-          <a:lstStyle/>
-          <a:p>
-            <a:pPr algn="ctr"/>
-            <a:endParaRPr lang="fr-FR"/>
-          </a:p>
-        </p:txBody>
-      </p:sp>
-      <p:cxnSp>
-        <p:nvCxnSpPr>
-          <p:cNvPr id="25" name="Connecteur droit avec flèche 24"/>
-          <p:cNvCxnSpPr/>
-          <p:nvPr/>
-        </p:nvCxnSpPr>
-        <p:spPr>
-          <a:xfrm>
-            <a:off x="4391024" y="1266824"/>
-            <a:ext cx="0" cy="157586"/>
-          </a:xfrm>
-          <a:prstGeom prst="straightConnector1">
-            <a:avLst/>
-          </a:prstGeom>
-          <a:ln w="57150">
-            <a:solidFill>
-              <a:schemeClr val="tx1"/>
-            </a:solidFill>
-            <a:tailEnd type="triangle"/>
-          </a:ln>
-        </p:spPr>
-        <p:style>
-          <a:lnRef idx="1">
-            <a:schemeClr val="accent1"/>
-          </a:lnRef>
-          <a:fillRef idx="0">
-            <a:schemeClr val="accent1"/>
-          </a:fillRef>
-          <a:effectRef idx="0">
-            <a:schemeClr val="accent1"/>
-          </a:effectRef>
-          <a:fontRef idx="minor">
-            <a:schemeClr val="tx1"/>
-          </a:fontRef>
-        </p:style>
-      </p:cxnSp>
-      <p:sp>
-        <p:nvSpPr>
-          <p:cNvPr id="28" name="ZoneTexte 27"/>
-          <p:cNvSpPr txBox="1"/>
-          <p:nvPr/>
-        </p:nvSpPr>
-        <p:spPr>
-          <a:xfrm>
-            <a:off x="4472372" y="1194234"/>
-            <a:ext cx="330540" cy="400110"/>
-          </a:xfrm>
-          <a:prstGeom prst="rect">
-            <a:avLst/>
-          </a:prstGeom>
-          <a:noFill/>
-        </p:spPr>
-        <p:txBody>
-          <a:bodyPr wrap="none" rtlCol="0">
-            <a:spAutoFit/>
-          </a:bodyPr>
-          <a:lstStyle/>
-          <a:p>
-            <a:r>
-              <a:rPr lang="fr-FR" sz="2000" b="1" dirty="0" smtClean="0"/>
-              <a:t>i</a:t>
-            </a:r>
-            <a:r>
-              <a:rPr lang="fr-FR" sz="2000" b="1" baseline="-25000" dirty="0" smtClean="0"/>
-              <a:t>1</a:t>
-            </a:r>
-            <a:endParaRPr lang="fr-FR" sz="2000" b="1" baseline="-25000" dirty="0"/>
-          </a:p>
-        </p:txBody>
-      </p:sp>
-    </p:spTree>
-    <p:extLst>
-      <p:ext uri="{BB962C8B-B14F-4D97-AF65-F5344CB8AC3E}">
-        <p14:creationId xmlns:p14="http://schemas.microsoft.com/office/powerpoint/2010/main" val="3674708944"/>
       </p:ext>
     </p:extLst>
   </p:cSld>
